--- a/725/進度報告.pptx
+++ b/725/進度報告.pptx
@@ -9,10 +9,6 @@
     <p:sldId id="257" r:id="rId8"/>
     <p:sldId id="258" r:id="rId9"/>
     <p:sldId id="259" r:id="rId10"/>
-    <p:sldId id="260" r:id="rId11"/>
-    <p:sldId id="261" r:id="rId12"/>
-    <p:sldId id="262" r:id="rId13"/>
-    <p:sldId id="263" r:id="rId14"/>
   </p:sldIdLst>
   <p:sldSz cx="12188952" cy="6858000" type="screen4x3"/>
   <p:notesSz cx="6858000" cy="9144000"/>
@@ -3124,7 +3120,7 @@
                 </a:solidFill>
                 <a:latin typeface="微軟正黑體"/>
               </a:rPr>
-              <a:t>本週進度報告:提高檔數與分族群實驗</a:t>
+              <a:t>進度報告:不同檔數與分族群測試結果</a:t>
             </a:r>
           </a:p>
         </p:txBody>
@@ -3164,13 +3160,13 @@
           </a:p>
           <a:p>
             <a:r>
-              <a:rPr sz="1800">
+              <a:rPr sz="1600">
                 <a:solidFill>
                   <a:srgbClr val="52514E"/>
                 </a:solidFill>
                 <a:latin typeface="微軟正黑體"/>
               </a:rPr>
-              <a:t>核心問題:加更多股票、或改用同族群股票,能否突破 ~50%?</a:t>
+              <a:t>協定:date 批次(無洩漏)· raw 特徵 · w140 / m80 / N10 / g4 · seed 42</a:t>
             </a:r>
           </a:p>
         </p:txBody>
@@ -3222,559 +3218,7 @@
                 </a:solidFill>
                 <a:latin typeface="微軟正黑體"/>
               </a:rPr>
-              <a:t>本週做了什麼</a:t>
-            </a:r>
-          </a:p>
-        </p:txBody>
-      </p:sp>
-      <p:sp>
-        <p:nvSpPr>
-          <p:cNvPr id="3" name="TextBox 2"/>
-          <p:cNvSpPr txBox="1"/>
-          <p:nvPr/>
-        </p:nvSpPr>
-        <p:spPr>
-          <a:xfrm>
-            <a:off x="731520" y="1371600"/>
-            <a:ext cx="10789920" cy="5120640"/>
-          </a:xfrm>
-          <a:prstGeom prst="rect">
-            <a:avLst/>
-          </a:prstGeom>
-          <a:noFill/>
-        </p:spPr>
-        <p:txBody>
-          <a:bodyPr wrap="square">
-            <a:spAutoFit/>
-          </a:bodyPr>
-          <a:lstStyle/>
-          <a:p>
-            <a:pPr>
-              <a:spcAft>
-                <a:spcPts val="1000"/>
-              </a:spcAft>
-            </a:pPr>
-            <a:r>
-              <a:rPr sz="2100">
-                <a:solidFill>
-                  <a:srgbClr val="000000"/>
-                </a:solidFill>
-                <a:latin typeface="微軟正黑體"/>
-              </a:rPr>
-              <a:t>主軸一:提高檔數 — 建立 TW500 池(554 檔上市普通股), 50→500 每次 +50 共 10 輪</a:t>
-            </a:r>
-          </a:p>
-          <a:p>
-            <a:pPr>
-              <a:spcAft>
-                <a:spcPts val="1000"/>
-              </a:spcAft>
-            </a:pPr>
-            <a:r>
-              <a:rPr sz="2100">
-                <a:solidFill>
-                  <a:srgbClr val="000000"/>
-                </a:solidFill>
-                <a:latin typeface="微軟正黑體"/>
-              </a:rPr>
-              <a:t>主軸二:分族群 — 盤點電子族群 455 檔;全電子 / 半導體 / 電子零組件 / 金融對照 四組實驗</a:t>
-            </a:r>
-          </a:p>
-          <a:p>
-            <a:pPr>
-              <a:spcAft>
-                <a:spcPts val="1000"/>
-              </a:spcAft>
-            </a:pPr>
-            <a:r>
-              <a:rPr sz="2100">
-                <a:solidFill>
-                  <a:srgbClr val="000000"/>
-                </a:solidFill>
-                <a:latin typeface="微軟正黑體"/>
-              </a:rPr>
-              <a:t>前置工作:發現並修正評估協定的未來洩漏(本週所有數字均為乾淨協定)</a:t>
-            </a:r>
-          </a:p>
-          <a:p>
-            <a:pPr>
-              <a:spcAft>
-                <a:spcPts val="1000"/>
-              </a:spcAft>
-            </a:pPr>
-            <a:r>
-              <a:rPr sz="2100">
-                <a:solidFill>
-                  <a:srgbClr val="000000"/>
-                </a:solidFill>
-                <a:latin typeface="微軟正黑體"/>
-              </a:rPr>
-              <a:t>其他:XGB 同條件對照、論文網格重掃、論文原文核對、工程與文件整理</a:t>
-            </a:r>
-          </a:p>
-          <a:p>
-            <a:pPr>
-              <a:spcAft>
-                <a:spcPts val="1000"/>
-              </a:spcAft>
-            </a:pPr>
-            <a:r>
-              <a:rPr sz="2100">
-                <a:solidFill>
-                  <a:srgbClr val="000000"/>
-                </a:solidFill>
-                <a:latin typeface="微軟正黑體"/>
-              </a:rPr>
-              <a:t>交付:報告與操作文檔(725/)、實驗記錄與全部 JSON、規模曲線圖</a:t>
-            </a:r>
-          </a:p>
-        </p:txBody>
-      </p:sp>
-    </p:spTree>
-  </p:cSld>
-  <p:clrMapOvr>
-    <a:masterClrMapping/>
-  </p:clrMapOvr>
-</p:sld>
-</file>
-
-<file path=ppt/slides/slide3.xml><?xml version="1.0" encoding="utf-8"?>
-<p:sld xmlns:a="http://schemas.openxmlformats.org/drawingml/2006/main" xmlns:p="http://schemas.openxmlformats.org/presentationml/2006/main" xmlns:r="http://schemas.openxmlformats.org/officeDocument/2006/relationships">
-  <p:cSld>
-    <p:spTree>
-      <p:nvGrpSpPr>
-        <p:cNvPr id="1" name=""/>
-        <p:cNvGrpSpPr/>
-        <p:nvPr/>
-      </p:nvGrpSpPr>
-      <p:grpSpPr/>
-      <p:sp>
-        <p:nvSpPr>
-          <p:cNvPr id="2" name="TextBox 1"/>
-          <p:cNvSpPr txBox="1"/>
-          <p:nvPr/>
-        </p:nvSpPr>
-        <p:spPr>
-          <a:xfrm>
-            <a:off x="548640" y="365760"/>
-            <a:ext cx="11064240" cy="914400"/>
-          </a:xfrm>
-          <a:prstGeom prst="rect">
-            <a:avLst/>
-          </a:prstGeom>
-          <a:noFill/>
-        </p:spPr>
-        <p:txBody>
-          <a:bodyPr wrap="none">
-            <a:spAutoFit/>
-          </a:bodyPr>
-          <a:lstStyle/>
-          <a:p>
-            <a:r>
-              <a:rPr sz="3200" b="1">
-                <a:solidFill>
-                  <a:srgbClr val="000000"/>
-                </a:solidFill>
-                <a:latin typeface="微軟正黑體"/>
-              </a:rPr>
-              <a:t>前置:評估協定修正(為什麼數字可信)</a:t>
-            </a:r>
-          </a:p>
-        </p:txBody>
-      </p:sp>
-      <p:sp>
-        <p:nvSpPr>
-          <p:cNvPr id="3" name="TextBox 2"/>
-          <p:cNvSpPr txBox="1"/>
-          <p:nvPr/>
-        </p:nvSpPr>
-        <p:spPr>
-          <a:xfrm>
-            <a:off x="731520" y="1280160"/>
-            <a:ext cx="10789920" cy="1554480"/>
-          </a:xfrm>
-          <a:prstGeom prst="rect">
-            <a:avLst/>
-          </a:prstGeom>
-          <a:noFill/>
-        </p:spPr>
-        <p:txBody>
-          <a:bodyPr wrap="square">
-            <a:spAutoFit/>
-          </a:bodyPr>
-          <a:lstStyle/>
-          <a:p/>
-          <a:p>
-            <a:r>
-              <a:rPr sz="1900">
-                <a:solidFill>
-                  <a:srgbClr val="000000"/>
-                </a:solidFill>
-                <a:latin typeface="微軟正黑體"/>
-              </a:rPr>
-              <a:t>•  論文的 self-attention 對「同一批樣本」互相運算,原本連續切批會讓「明天的樣本」與「今天」同批 — 間接看到答案。</a:t>
-            </a:r>
-          </a:p>
-          <a:p>
-            <a:r>
-              <a:rPr sz="1900">
-                <a:solidFill>
-                  <a:srgbClr val="000000"/>
-                </a:solidFill>
-                <a:latin typeface="微軟正黑體"/>
-              </a:rPr>
-              <a:t>•  改為 date 批次(同日所有股票一批):無洩漏,且與論文「探索股票間關聯」文字相容。</a:t>
-            </a:r>
-          </a:p>
-        </p:txBody>
-      </p:sp>
-      <p:graphicFrame>
-        <p:nvGraphicFramePr>
-          <p:cNvPr id="4" name="Table 3"/>
-          <p:cNvGraphicFramePr>
-            <a:graphicFrameLocks noGrp="1"/>
-          </p:cNvGraphicFramePr>
-          <p:nvPr/>
-        </p:nvGraphicFramePr>
-        <p:xfrm>
-          <a:off x="731520" y="3108960"/>
-          <a:ext cx="10698480" cy="1536192"/>
-        </p:xfrm>
-        <a:graphic>
-          <a:graphicData uri="http://schemas.openxmlformats.org/drawingml/2006/table">
-            <a:tbl>
-              <a:tblPr firstRow="1" bandRow="1">
-                <a:tableStyleId>{5C22544A-7EE6-4342-B048-85BDC9FD1C3A}</a:tableStyleId>
-              </a:tblPr>
-              <a:tblGrid>
-                <a:gridCol w="5029200"/>
-                <a:gridCol w="3108960"/>
-                <a:gridCol w="2560320"/>
-              </a:tblGrid>
-              <a:tr h="384048">
-                <a:tc>
-                  <a:txBody>
-                    <a:bodyPr/>
-                    <a:lstStyle/>
-                    <a:p>
-                      <a:r>
-                        <a:rPr sz="1500" b="1">
-                          <a:solidFill>
-                            <a:srgbClr val="000000"/>
-                          </a:solidFill>
-                          <a:latin typeface="微軟正黑體"/>
-                        </a:rPr>
-                        <a:t>評估方式(同一顆模型)</a:t>
-                      </a:r>
-                    </a:p>
-                  </a:txBody>
-                  <a:tcPr>
-                    <a:solidFill>
-                      <a:srgbClr val="EFEEEA"/>
-                    </a:solidFill>
-                  </a:tcPr>
-                </a:tc>
-                <a:tc>
-                  <a:txBody>
-                    <a:bodyPr/>
-                    <a:lstStyle/>
-                    <a:p>
-                      <a:r>
-                        <a:rPr sz="1500" b="1">
-                          <a:solidFill>
-                            <a:srgbClr val="000000"/>
-                          </a:solidFill>
-                          <a:latin typeface="微軟正黑體"/>
-                        </a:rPr>
-                        <a:t>同批有無未來樣本</a:t>
-                      </a:r>
-                    </a:p>
-                  </a:txBody>
-                  <a:tcPr>
-                    <a:solidFill>
-                      <a:srgbClr val="EFEEEA"/>
-                    </a:solidFill>
-                  </a:tcPr>
-                </a:tc>
-                <a:tc>
-                  <a:txBody>
-                    <a:bodyPr/>
-                    <a:lstStyle/>
-                    <a:p>
-                      <a:r>
-                        <a:rPr sz="1500" b="1">
-                          <a:solidFill>
-                            <a:srgbClr val="000000"/>
-                          </a:solidFill>
-                          <a:latin typeface="微軟正黑體"/>
-                        </a:rPr>
-                        <a:t>Test Acc</a:t>
-                      </a:r>
-                    </a:p>
-                  </a:txBody>
-                  <a:tcPr>
-                    <a:solidFill>
-                      <a:srgbClr val="EFEEEA"/>
-                    </a:solidFill>
-                  </a:tcPr>
-                </a:tc>
-              </a:tr>
-              <a:tr h="384048">
-                <a:tc>
-                  <a:txBody>
-                    <a:bodyPr/>
-                    <a:lstStyle/>
-                    <a:p>
-                      <a:r>
-                        <a:rPr sz="1500" b="0">
-                          <a:solidFill>
-                            <a:srgbClr val="000000"/>
-                          </a:solidFill>
-                          <a:latin typeface="微軟正黑體"/>
-                        </a:rPr>
-                        <a:t>序向 128 筆(舊協定)</a:t>
-                      </a:r>
-                    </a:p>
-                  </a:txBody>
-                  <a:tcPr>
-                    <a:solidFill>
-                      <a:srgbClr val="FFFFFF"/>
-                    </a:solidFill>
-                  </a:tcPr>
-                </a:tc>
-                <a:tc>
-                  <a:txBody>
-                    <a:bodyPr/>
-                    <a:lstStyle/>
-                    <a:p>
-                      <a:r>
-                        <a:rPr sz="1500" b="0">
-                          <a:solidFill>
-                            <a:srgbClr val="000000"/>
-                          </a:solidFill>
-                          <a:latin typeface="微軟正黑體"/>
-                        </a:rPr>
-                        <a:t>有</a:t>
-                      </a:r>
-                    </a:p>
-                  </a:txBody>
-                  <a:tcPr>
-                    <a:solidFill>
-                      <a:srgbClr val="FFFFFF"/>
-                    </a:solidFill>
-                  </a:tcPr>
-                </a:tc>
-                <a:tc>
-                  <a:txBody>
-                    <a:bodyPr/>
-                    <a:lstStyle/>
-                    <a:p>
-                      <a:r>
-                        <a:rPr sz="1500" b="0">
-                          <a:solidFill>
-                            <a:srgbClr val="000000"/>
-                          </a:solidFill>
-                          <a:latin typeface="微軟正黑體"/>
-                        </a:rPr>
-                        <a:t>52.70%</a:t>
-                      </a:r>
-                    </a:p>
-                  </a:txBody>
-                  <a:tcPr>
-                    <a:solidFill>
-                      <a:srgbClr val="FFFFFF"/>
-                    </a:solidFill>
-                  </a:tcPr>
-                </a:tc>
-              </a:tr>
-              <a:tr h="384048">
-                <a:tc>
-                  <a:txBody>
-                    <a:bodyPr/>
-                    <a:lstStyle/>
-                    <a:p>
-                      <a:r>
-                        <a:rPr sz="1500" b="0">
-                          <a:solidFill>
-                            <a:srgbClr val="000000"/>
-                          </a:solidFill>
-                          <a:latin typeface="微軟正黑體"/>
-                        </a:rPr>
-                        <a:t>同日一批(新標準)</a:t>
-                      </a:r>
-                    </a:p>
-                  </a:txBody>
-                  <a:tcPr>
-                    <a:solidFill>
-                      <a:srgbClr val="FFFFFF"/>
-                    </a:solidFill>
-                  </a:tcPr>
-                </a:tc>
-                <a:tc>
-                  <a:txBody>
-                    <a:bodyPr/>
-                    <a:lstStyle/>
-                    <a:p>
-                      <a:r>
-                        <a:rPr sz="1500" b="0">
-                          <a:solidFill>
-                            <a:srgbClr val="000000"/>
-                          </a:solidFill>
-                          <a:latin typeface="微軟正黑體"/>
-                        </a:rPr>
-                        <a:t>無</a:t>
-                      </a:r>
-                    </a:p>
-                  </a:txBody>
-                  <a:tcPr>
-                    <a:solidFill>
-                      <a:srgbClr val="FFFFFF"/>
-                    </a:solidFill>
-                  </a:tcPr>
-                </a:tc>
-                <a:tc>
-                  <a:txBody>
-                    <a:bodyPr/>
-                    <a:lstStyle/>
-                    <a:p>
-                      <a:r>
-                        <a:rPr sz="1500" b="0">
-                          <a:solidFill>
-                            <a:srgbClr val="000000"/>
-                          </a:solidFill>
-                          <a:latin typeface="微軟正黑體"/>
-                        </a:rPr>
-                        <a:t>51.30%</a:t>
-                      </a:r>
-                    </a:p>
-                  </a:txBody>
-                  <a:tcPr>
-                    <a:solidFill>
-                      <a:srgbClr val="FFFFFF"/>
-                    </a:solidFill>
-                  </a:tcPr>
-                </a:tc>
-              </a:tr>
-              <a:tr h="384048">
-                <a:tc>
-                  <a:txBody>
-                    <a:bodyPr/>
-                    <a:lstStyle/>
-                    <a:p>
-                      <a:r>
-                        <a:rPr sz="1500" b="0">
-                          <a:solidFill>
-                            <a:srgbClr val="000000"/>
-                          </a:solidFill>
-                          <a:latin typeface="微軟正黑體"/>
-                        </a:rPr>
-                        <a:t>一次一筆</a:t>
-                      </a:r>
-                    </a:p>
-                  </a:txBody>
-                  <a:tcPr>
-                    <a:solidFill>
-                      <a:srgbClr val="FFFFFF"/>
-                    </a:solidFill>
-                  </a:tcPr>
-                </a:tc>
-                <a:tc>
-                  <a:txBody>
-                    <a:bodyPr/>
-                    <a:lstStyle/>
-                    <a:p>
-                      <a:r>
-                        <a:rPr sz="1500" b="0">
-                          <a:solidFill>
-                            <a:srgbClr val="000000"/>
-                          </a:solidFill>
-                          <a:latin typeface="微軟正黑體"/>
-                        </a:rPr>
-                        <a:t>完全無跨樣本</a:t>
-                      </a:r>
-                    </a:p>
-                  </a:txBody>
-                  <a:tcPr>
-                    <a:solidFill>
-                      <a:srgbClr val="FFFFFF"/>
-                    </a:solidFill>
-                  </a:tcPr>
-                </a:tc>
-                <a:tc>
-                  <a:txBody>
-                    <a:bodyPr/>
-                    <a:lstStyle/>
-                    <a:p>
-                      <a:r>
-                        <a:rPr sz="1500" b="0">
-                          <a:solidFill>
-                            <a:srgbClr val="000000"/>
-                          </a:solidFill>
-                          <a:latin typeface="微軟正黑體"/>
-                        </a:rPr>
-                        <a:t>46.82%</a:t>
-                      </a:r>
-                    </a:p>
-                  </a:txBody>
-                  <a:tcPr>
-                    <a:solidFill>
-                      <a:srgbClr val="FFFFFF"/>
-                    </a:solidFill>
-                  </a:tcPr>
-                </a:tc>
-              </a:tr>
-            </a:tbl>
-          </a:graphicData>
-        </a:graphic>
-      </p:graphicFrame>
-    </p:spTree>
-  </p:cSld>
-  <p:clrMapOvr>
-    <a:masterClrMapping/>
-  </p:clrMapOvr>
-</p:sld>
-</file>
-
-<file path=ppt/slides/slide4.xml><?xml version="1.0" encoding="utf-8"?>
-<p:sld xmlns:a="http://schemas.openxmlformats.org/drawingml/2006/main" xmlns:p="http://schemas.openxmlformats.org/presentationml/2006/main" xmlns:r="http://schemas.openxmlformats.org/officeDocument/2006/relationships">
-  <p:cSld>
-    <p:spTree>
-      <p:nvGrpSpPr>
-        <p:cNvPr id="1" name=""/>
-        <p:cNvGrpSpPr/>
-        <p:nvPr/>
-      </p:nvGrpSpPr>
-      <p:grpSpPr/>
-      <p:sp>
-        <p:nvSpPr>
-          <p:cNvPr id="2" name="TextBox 1"/>
-          <p:cNvSpPr txBox="1"/>
-          <p:nvPr/>
-        </p:nvSpPr>
-        <p:spPr>
-          <a:xfrm>
-            <a:off x="548640" y="365760"/>
-            <a:ext cx="11064240" cy="914400"/>
-          </a:xfrm>
-          <a:prstGeom prst="rect">
-            <a:avLst/>
-          </a:prstGeom>
-          <a:noFill/>
-        </p:spPr>
-        <p:txBody>
-          <a:bodyPr wrap="none">
-            <a:spAutoFit/>
-          </a:bodyPr>
-          <a:lstStyle/>
-          <a:p>
-            <a:r>
-              <a:rPr sz="3200" b="1">
-                <a:solidFill>
-                  <a:srgbClr val="000000"/>
-                </a:solidFill>
-                <a:latin typeface="微軟正黑體"/>
-              </a:rPr>
-              <a:t>主軸一:提高檔數 50 → 500(10 輪)</a:t>
+              <a:t>不同檔數:50 → 500(每次 +50, 共 10 輪)</a:t>
             </a:r>
           </a:p>
         </p:txBody>
@@ -3811,8 +3255,8 @@
         </p:nvSpPr>
         <p:spPr>
           <a:xfrm>
-            <a:off x="731520" y="6217920"/>
-            <a:ext cx="10789920" cy="457200"/>
+            <a:off x="731520" y="6263640"/>
+            <a:ext cx="10789920" cy="640080"/>
           </a:xfrm>
           <a:prstGeom prst="rect">
             <a:avLst/>
@@ -3820,19 +3264,19 @@
           <a:noFill/>
         </p:spPr>
         <p:txBody>
-          <a:bodyPr wrap="none">
+          <a:bodyPr wrap="square">
             <a:spAutoFit/>
           </a:bodyPr>
           <a:lstStyle/>
           <a:p>
             <a:r>
-              <a:rPr sz="1500">
+              <a:rPr sz="1400">
                 <a:solidFill>
                   <a:srgbClr val="52514E"/>
                 </a:solidFill>
                 <a:latin typeface="微軟正黑體"/>
               </a:rPr>
-              <a:t>TW500 巢狀池(前 50 = TW50);訓練樣本 9 萬 → 88.5 萬(10 倍)</a:t>
+              <a:t>TW500 巢狀池(前 50 = 原 TW50);訓練樣本 9 萬 → 88.5 萬</a:t>
             </a:r>
           </a:p>
         </p:txBody>
@@ -3845,7 +3289,7 @@
 </p:sld>
 </file>
 
-<file path=ppt/slides/slide5.xml><?xml version="1.0" encoding="utf-8"?>
+<file path=ppt/slides/slide3.xml><?xml version="1.0" encoding="utf-8"?>
 <p:sld xmlns:a="http://schemas.openxmlformats.org/drawingml/2006/main" xmlns:p="http://schemas.openxmlformats.org/presentationml/2006/main" xmlns:r="http://schemas.openxmlformats.org/officeDocument/2006/relationships">
   <p:cSld>
     <p:spTree>
@@ -3884,21 +3328,1525 @@
                 </a:solidFill>
                 <a:latin typeface="微軟正黑體"/>
               </a:rPr>
-              <a:t>規模實驗結論:資料量不是瓶頸</a:t>
-            </a:r>
-          </a:p>
-        </p:txBody>
-      </p:sp>
-      <p:sp>
-        <p:nvSpPr>
-          <p:cNvPr id="3" name="TextBox 2"/>
+              <a:t>不同檔數:結果</a:t>
+            </a:r>
+          </a:p>
+        </p:txBody>
+      </p:sp>
+      <p:graphicFrame>
+        <p:nvGraphicFramePr>
+          <p:cNvPr id="3" name="Table 2"/>
+          <p:cNvGraphicFramePr>
+            <a:graphicFrameLocks noGrp="1"/>
+          </p:cNvGraphicFramePr>
+          <p:nvPr/>
+        </p:nvGraphicFramePr>
+        <p:xfrm>
+          <a:off x="731520" y="1325880"/>
+          <a:ext cx="10698480" cy="4224528"/>
+        </p:xfrm>
+        <a:graphic>
+          <a:graphicData uri="http://schemas.openxmlformats.org/drawingml/2006/table">
+            <a:tbl>
+              <a:tblPr firstRow="1" bandRow="1">
+                <a:tableStyleId>{5C22544A-7EE6-4342-B048-85BDC9FD1C3A}</a:tableStyleId>
+              </a:tblPr>
+              <a:tblGrid>
+                <a:gridCol w="1097280"/>
+                <a:gridCol w="1737360"/>
+                <a:gridCol w="1554480"/>
+                <a:gridCol w="1737360"/>
+                <a:gridCol w="1645920"/>
+                <a:gridCol w="2926080"/>
+              </a:tblGrid>
+              <a:tr h="384048">
+                <a:tc>
+                  <a:txBody>
+                    <a:bodyPr/>
+                    <a:lstStyle/>
+                    <a:p>
+                      <a:r>
+                        <a:rPr sz="1400" b="1">
+                          <a:solidFill>
+                            <a:srgbClr val="000000"/>
+                          </a:solidFill>
+                          <a:latin typeface="微軟正黑體"/>
+                        </a:rPr>
+                        <a:t>檔數</a:t>
+                      </a:r>
+                    </a:p>
+                  </a:txBody>
+                  <a:tcPr>
+                    <a:solidFill>
+                      <a:srgbClr val="EFEEEA"/>
+                    </a:solidFill>
+                  </a:tcPr>
+                </a:tc>
+                <a:tc>
+                  <a:txBody>
+                    <a:bodyPr/>
+                    <a:lstStyle/>
+                    <a:p>
+                      <a:r>
+                        <a:rPr sz="1400" b="1">
+                          <a:solidFill>
+                            <a:srgbClr val="000000"/>
+                          </a:solidFill>
+                          <a:latin typeface="微軟正黑體"/>
+                        </a:rPr>
+                        <a:t>訓練樣本</a:t>
+                      </a:r>
+                    </a:p>
+                  </a:txBody>
+                  <a:tcPr>
+                    <a:solidFill>
+                      <a:srgbClr val="EFEEEA"/>
+                    </a:solidFill>
+                  </a:tcPr>
+                </a:tc>
+                <a:tc>
+                  <a:txBody>
+                    <a:bodyPr/>
+                    <a:lstStyle/>
+                    <a:p>
+                      <a:r>
+                        <a:rPr sz="1400" b="1">
+                          <a:solidFill>
+                            <a:srgbClr val="000000"/>
+                          </a:solidFill>
+                          <a:latin typeface="微軟正黑體"/>
+                        </a:rPr>
+                        <a:t>Acc</a:t>
+                      </a:r>
+                    </a:p>
+                  </a:txBody>
+                  <a:tcPr>
+                    <a:solidFill>
+                      <a:srgbClr val="EFEEEA"/>
+                    </a:solidFill>
+                  </a:tcPr>
+                </a:tc>
+                <a:tc>
+                  <a:txBody>
+                    <a:bodyPr/>
+                    <a:lstStyle/>
+                    <a:p>
+                      <a:r>
+                        <a:rPr sz="1400" b="1">
+                          <a:solidFill>
+                            <a:srgbClr val="000000"/>
+                          </a:solidFill>
+                          <a:latin typeface="微軟正黑體"/>
+                        </a:rPr>
+                        <a:t>F1 macro</a:t>
+                      </a:r>
+                    </a:p>
+                  </a:txBody>
+                  <a:tcPr>
+                    <a:solidFill>
+                      <a:srgbClr val="EFEEEA"/>
+                    </a:solidFill>
+                  </a:tcPr>
+                </a:tc>
+                <a:tc>
+                  <a:txBody>
+                    <a:bodyPr/>
+                    <a:lstStyle/>
+                    <a:p>
+                      <a:r>
+                        <a:rPr sz="1400" b="1">
+                          <a:solidFill>
+                            <a:srgbClr val="000000"/>
+                          </a:solidFill>
+                          <a:latin typeface="微軟正黑體"/>
+                        </a:rPr>
+                        <a:t>回測超額</a:t>
+                      </a:r>
+                    </a:p>
+                  </a:txBody>
+                  <a:tcPr>
+                    <a:solidFill>
+                      <a:srgbClr val="EFEEEA"/>
+                    </a:solidFill>
+                  </a:tcPr>
+                </a:tc>
+                <a:tc>
+                  <a:txBody>
+                    <a:bodyPr/>
+                    <a:lstStyle/>
+                    <a:p>
+                      <a:r>
+                        <a:rPr sz="1400" b="1">
+                          <a:solidFill>
+                            <a:srgbClr val="000000"/>
+                          </a:solidFill>
+                          <a:latin typeface="微軟正黑體"/>
+                        </a:rPr>
+                        <a:t>形態</a:t>
+                      </a:r>
+                    </a:p>
+                  </a:txBody>
+                  <a:tcPr>
+                    <a:solidFill>
+                      <a:srgbClr val="EFEEEA"/>
+                    </a:solidFill>
+                  </a:tcPr>
+                </a:tc>
+              </a:tr>
+              <a:tr h="384048">
+                <a:tc>
+                  <a:txBody>
+                    <a:bodyPr/>
+                    <a:lstStyle/>
+                    <a:p>
+                      <a:r>
+                        <a:rPr sz="1400" b="0">
+                          <a:solidFill>
+                            <a:srgbClr val="000000"/>
+                          </a:solidFill>
+                          <a:latin typeface="微軟正黑體"/>
+                        </a:rPr>
+                        <a:t>50</a:t>
+                      </a:r>
+                    </a:p>
+                  </a:txBody>
+                  <a:tcPr>
+                    <a:solidFill>
+                      <a:srgbClr val="FFFFFF"/>
+                    </a:solidFill>
+                  </a:tcPr>
+                </a:tc>
+                <a:tc>
+                  <a:txBody>
+                    <a:bodyPr/>
+                    <a:lstStyle/>
+                    <a:p>
+                      <a:r>
+                        <a:rPr sz="1400" b="0">
+                          <a:solidFill>
+                            <a:srgbClr val="000000"/>
+                          </a:solidFill>
+                          <a:latin typeface="微軟正黑體"/>
+                        </a:rPr>
+                        <a:t>90,250</a:t>
+                      </a:r>
+                    </a:p>
+                  </a:txBody>
+                  <a:tcPr>
+                    <a:solidFill>
+                      <a:srgbClr val="FFFFFF"/>
+                    </a:solidFill>
+                  </a:tcPr>
+                </a:tc>
+                <a:tc>
+                  <a:txBody>
+                    <a:bodyPr/>
+                    <a:lstStyle/>
+                    <a:p>
+                      <a:r>
+                        <a:rPr sz="1400" b="0">
+                          <a:solidFill>
+                            <a:srgbClr val="000000"/>
+                          </a:solidFill>
+                          <a:latin typeface="微軟正黑體"/>
+                        </a:rPr>
+                        <a:t>54.33%</a:t>
+                      </a:r>
+                    </a:p>
+                  </a:txBody>
+                  <a:tcPr>
+                    <a:solidFill>
+                      <a:srgbClr val="FFFFFF"/>
+                    </a:solidFill>
+                  </a:tcPr>
+                </a:tc>
+                <a:tc>
+                  <a:txBody>
+                    <a:bodyPr/>
+                    <a:lstStyle/>
+                    <a:p>
+                      <a:r>
+                        <a:rPr sz="1400" b="0">
+                          <a:solidFill>
+                            <a:srgbClr val="000000"/>
+                          </a:solidFill>
+                          <a:latin typeface="微軟正黑體"/>
+                        </a:rPr>
+                        <a:t>38.44%</a:t>
+                      </a:r>
+                    </a:p>
+                  </a:txBody>
+                  <a:tcPr>
+                    <a:solidFill>
+                      <a:srgbClr val="FFFFFF"/>
+                    </a:solidFill>
+                  </a:tcPr>
+                </a:tc>
+                <a:tc>
+                  <a:txBody>
+                    <a:bodyPr/>
+                    <a:lstStyle/>
+                    <a:p>
+                      <a:r>
+                        <a:rPr sz="1400" b="0">
+                          <a:solidFill>
+                            <a:srgbClr val="000000"/>
+                          </a:solidFill>
+                          <a:latin typeface="微軟正黑體"/>
+                        </a:rPr>
+                        <a:t>-10.6%</a:t>
+                      </a:r>
+                    </a:p>
+                  </a:txBody>
+                  <a:tcPr>
+                    <a:solidFill>
+                      <a:srgbClr val="FFFFFF"/>
+                    </a:solidFill>
+                  </a:tcPr>
+                </a:tc>
+                <a:tc>
+                  <a:txBody>
+                    <a:bodyPr/>
+                    <a:lstStyle/>
+                    <a:p>
+                      <a:r>
+                        <a:rPr sz="1400" b="0">
+                          <a:solidFill>
+                            <a:srgbClr val="000000"/>
+                          </a:solidFill>
+                          <a:latin typeface="微軟正黑體"/>
+                        </a:rPr>
+                        <a:t>塌縮(全押跌)</a:t>
+                      </a:r>
+                    </a:p>
+                  </a:txBody>
+                  <a:tcPr>
+                    <a:solidFill>
+                      <a:srgbClr val="FFFFFF"/>
+                    </a:solidFill>
+                  </a:tcPr>
+                </a:tc>
+              </a:tr>
+              <a:tr h="384048">
+                <a:tc>
+                  <a:txBody>
+                    <a:bodyPr/>
+                    <a:lstStyle/>
+                    <a:p>
+                      <a:r>
+                        <a:rPr sz="1400" b="0">
+                          <a:solidFill>
+                            <a:srgbClr val="000000"/>
+                          </a:solidFill>
+                          <a:latin typeface="微軟正黑體"/>
+                        </a:rPr>
+                        <a:t>100</a:t>
+                      </a:r>
+                    </a:p>
+                  </a:txBody>
+                  <a:tcPr>
+                    <a:solidFill>
+                      <a:srgbClr val="FFFFFF"/>
+                    </a:solidFill>
+                  </a:tcPr>
+                </a:tc>
+                <a:tc>
+                  <a:txBody>
+                    <a:bodyPr/>
+                    <a:lstStyle/>
+                    <a:p>
+                      <a:r>
+                        <a:rPr sz="1400" b="0">
+                          <a:solidFill>
+                            <a:srgbClr val="000000"/>
+                          </a:solidFill>
+                          <a:latin typeface="微軟正黑體"/>
+                        </a:rPr>
+                        <a:t>178,846</a:t>
+                      </a:r>
+                    </a:p>
+                  </a:txBody>
+                  <a:tcPr>
+                    <a:solidFill>
+                      <a:srgbClr val="FFFFFF"/>
+                    </a:solidFill>
+                  </a:tcPr>
+                </a:tc>
+                <a:tc>
+                  <a:txBody>
+                    <a:bodyPr/>
+                    <a:lstStyle/>
+                    <a:p>
+                      <a:r>
+                        <a:rPr sz="1400" b="0">
+                          <a:solidFill>
+                            <a:srgbClr val="000000"/>
+                          </a:solidFill>
+                          <a:latin typeface="微軟正黑體"/>
+                        </a:rPr>
+                        <a:t>54.81%</a:t>
+                      </a:r>
+                    </a:p>
+                  </a:txBody>
+                  <a:tcPr>
+                    <a:solidFill>
+                      <a:srgbClr val="FFFFFF"/>
+                    </a:solidFill>
+                  </a:tcPr>
+                </a:tc>
+                <a:tc>
+                  <a:txBody>
+                    <a:bodyPr/>
+                    <a:lstStyle/>
+                    <a:p>
+                      <a:r>
+                        <a:rPr sz="1400" b="0">
+                          <a:solidFill>
+                            <a:srgbClr val="000000"/>
+                          </a:solidFill>
+                          <a:latin typeface="微軟正黑體"/>
+                        </a:rPr>
+                        <a:t>47.38%</a:t>
+                      </a:r>
+                    </a:p>
+                  </a:txBody>
+                  <a:tcPr>
+                    <a:solidFill>
+                      <a:srgbClr val="FFFFFF"/>
+                    </a:solidFill>
+                  </a:tcPr>
+                </a:tc>
+                <a:tc>
+                  <a:txBody>
+                    <a:bodyPr/>
+                    <a:lstStyle/>
+                    <a:p>
+                      <a:r>
+                        <a:rPr sz="1400" b="0">
+                          <a:solidFill>
+                            <a:srgbClr val="000000"/>
+                          </a:solidFill>
+                          <a:latin typeface="微軟正黑體"/>
+                        </a:rPr>
+                        <a:t>+0.1%</a:t>
+                      </a:r>
+                    </a:p>
+                  </a:txBody>
+                  <a:tcPr>
+                    <a:solidFill>
+                      <a:srgbClr val="FFFFFF"/>
+                    </a:solidFill>
+                  </a:tcPr>
+                </a:tc>
+                <a:tc>
+                  <a:txBody>
+                    <a:bodyPr/>
+                    <a:lstStyle/>
+                    <a:p>
+                      <a:r>
+                        <a:rPr sz="1400" b="0">
+                          <a:solidFill>
+                            <a:srgbClr val="000000"/>
+                          </a:solidFill>
+                          <a:latin typeface="微軟正黑體"/>
+                        </a:rPr>
+                        <a:t>半塌縮</a:t>
+                      </a:r>
+                    </a:p>
+                  </a:txBody>
+                  <a:tcPr>
+                    <a:solidFill>
+                      <a:srgbClr val="FFFFFF"/>
+                    </a:solidFill>
+                  </a:tcPr>
+                </a:tc>
+              </a:tr>
+              <a:tr h="384048">
+                <a:tc>
+                  <a:txBody>
+                    <a:bodyPr/>
+                    <a:lstStyle/>
+                    <a:p>
+                      <a:r>
+                        <a:rPr sz="1400" b="0">
+                          <a:solidFill>
+                            <a:srgbClr val="000000"/>
+                          </a:solidFill>
+                          <a:latin typeface="微軟正黑體"/>
+                        </a:rPr>
+                        <a:t>150</a:t>
+                      </a:r>
+                    </a:p>
+                  </a:txBody>
+                  <a:tcPr>
+                    <a:solidFill>
+                      <a:srgbClr val="FFFFFF"/>
+                    </a:solidFill>
+                  </a:tcPr>
+                </a:tc>
+                <a:tc>
+                  <a:txBody>
+                    <a:bodyPr/>
+                    <a:lstStyle/>
+                    <a:p>
+                      <a:r>
+                        <a:rPr sz="1400" b="0">
+                          <a:solidFill>
+                            <a:srgbClr val="000000"/>
+                          </a:solidFill>
+                          <a:latin typeface="微軟正黑體"/>
+                        </a:rPr>
+                        <a:t>269,096</a:t>
+                      </a:r>
+                    </a:p>
+                  </a:txBody>
+                  <a:tcPr>
+                    <a:solidFill>
+                      <a:srgbClr val="FFFFFF"/>
+                    </a:solidFill>
+                  </a:tcPr>
+                </a:tc>
+                <a:tc>
+                  <a:txBody>
+                    <a:bodyPr/>
+                    <a:lstStyle/>
+                    <a:p>
+                      <a:r>
+                        <a:rPr sz="1400" b="0">
+                          <a:solidFill>
+                            <a:srgbClr val="000000"/>
+                          </a:solidFill>
+                          <a:latin typeface="微軟正黑體"/>
+                        </a:rPr>
+                        <a:t>55.05%</a:t>
+                      </a:r>
+                    </a:p>
+                  </a:txBody>
+                  <a:tcPr>
+                    <a:solidFill>
+                      <a:srgbClr val="FFFFFF"/>
+                    </a:solidFill>
+                  </a:tcPr>
+                </a:tc>
+                <a:tc>
+                  <a:txBody>
+                    <a:bodyPr/>
+                    <a:lstStyle/>
+                    <a:p>
+                      <a:r>
+                        <a:rPr sz="1400" b="0">
+                          <a:solidFill>
+                            <a:srgbClr val="000000"/>
+                          </a:solidFill>
+                          <a:latin typeface="微軟正黑體"/>
+                        </a:rPr>
+                        <a:t>39.87%</a:t>
+                      </a:r>
+                    </a:p>
+                  </a:txBody>
+                  <a:tcPr>
+                    <a:solidFill>
+                      <a:srgbClr val="FFFFFF"/>
+                    </a:solidFill>
+                  </a:tcPr>
+                </a:tc>
+                <a:tc>
+                  <a:txBody>
+                    <a:bodyPr/>
+                    <a:lstStyle/>
+                    <a:p>
+                      <a:r>
+                        <a:rPr sz="1400" b="0">
+                          <a:solidFill>
+                            <a:srgbClr val="000000"/>
+                          </a:solidFill>
+                          <a:latin typeface="微軟正黑體"/>
+                        </a:rPr>
+                        <a:t>-2.1%</a:t>
+                      </a:r>
+                    </a:p>
+                  </a:txBody>
+                  <a:tcPr>
+                    <a:solidFill>
+                      <a:srgbClr val="FFFFFF"/>
+                    </a:solidFill>
+                  </a:tcPr>
+                </a:tc>
+                <a:tc>
+                  <a:txBody>
+                    <a:bodyPr/>
+                    <a:lstStyle/>
+                    <a:p>
+                      <a:r>
+                        <a:rPr sz="1400" b="0">
+                          <a:solidFill>
+                            <a:srgbClr val="000000"/>
+                          </a:solidFill>
+                          <a:latin typeface="微軟正黑體"/>
+                        </a:rPr>
+                        <a:t>塌縮</a:t>
+                      </a:r>
+                    </a:p>
+                  </a:txBody>
+                  <a:tcPr>
+                    <a:solidFill>
+                      <a:srgbClr val="FFFFFF"/>
+                    </a:solidFill>
+                  </a:tcPr>
+                </a:tc>
+              </a:tr>
+              <a:tr h="384048">
+                <a:tc>
+                  <a:txBody>
+                    <a:bodyPr/>
+                    <a:lstStyle/>
+                    <a:p>
+                      <a:r>
+                        <a:rPr sz="1400" b="0">
+                          <a:solidFill>
+                            <a:srgbClr val="000000"/>
+                          </a:solidFill>
+                          <a:latin typeface="微軟正黑體"/>
+                        </a:rPr>
+                        <a:t>200</a:t>
+                      </a:r>
+                    </a:p>
+                  </a:txBody>
+                  <a:tcPr>
+                    <a:solidFill>
+                      <a:srgbClr val="FFFFFF"/>
+                    </a:solidFill>
+                  </a:tcPr>
+                </a:tc>
+                <a:tc>
+                  <a:txBody>
+                    <a:bodyPr/>
+                    <a:lstStyle/>
+                    <a:p>
+                      <a:r>
+                        <a:rPr sz="1400" b="0">
+                          <a:solidFill>
+                            <a:srgbClr val="000000"/>
+                          </a:solidFill>
+                          <a:latin typeface="微軟正黑體"/>
+                        </a:rPr>
+                        <a:t>359,346</a:t>
+                      </a:r>
+                    </a:p>
+                  </a:txBody>
+                  <a:tcPr>
+                    <a:solidFill>
+                      <a:srgbClr val="FFFFFF"/>
+                    </a:solidFill>
+                  </a:tcPr>
+                </a:tc>
+                <a:tc>
+                  <a:txBody>
+                    <a:bodyPr/>
+                    <a:lstStyle/>
+                    <a:p>
+                      <a:r>
+                        <a:rPr sz="1400" b="0">
+                          <a:solidFill>
+                            <a:srgbClr val="000000"/>
+                          </a:solidFill>
+                          <a:latin typeface="微軟正黑體"/>
+                        </a:rPr>
+                        <a:t>52.24%</a:t>
+                      </a:r>
+                    </a:p>
+                  </a:txBody>
+                  <a:tcPr>
+                    <a:solidFill>
+                      <a:srgbClr val="FFFFFF"/>
+                    </a:solidFill>
+                  </a:tcPr>
+                </a:tc>
+                <a:tc>
+                  <a:txBody>
+                    <a:bodyPr/>
+                    <a:lstStyle/>
+                    <a:p>
+                      <a:r>
+                        <a:rPr sz="1400" b="0">
+                          <a:solidFill>
+                            <a:srgbClr val="000000"/>
+                          </a:solidFill>
+                          <a:latin typeface="微軟正黑體"/>
+                        </a:rPr>
+                        <a:t>43.28%</a:t>
+                      </a:r>
+                    </a:p>
+                  </a:txBody>
+                  <a:tcPr>
+                    <a:solidFill>
+                      <a:srgbClr val="FFFFFF"/>
+                    </a:solidFill>
+                  </a:tcPr>
+                </a:tc>
+                <a:tc>
+                  <a:txBody>
+                    <a:bodyPr/>
+                    <a:lstStyle/>
+                    <a:p>
+                      <a:r>
+                        <a:rPr sz="1400" b="0">
+                          <a:solidFill>
+                            <a:srgbClr val="000000"/>
+                          </a:solidFill>
+                          <a:latin typeface="微軟正黑體"/>
+                        </a:rPr>
+                        <a:t>-13.5%</a:t>
+                      </a:r>
+                    </a:p>
+                  </a:txBody>
+                  <a:tcPr>
+                    <a:solidFill>
+                      <a:srgbClr val="FFFFFF"/>
+                    </a:solidFill>
+                  </a:tcPr>
+                </a:tc>
+                <a:tc>
+                  <a:txBody>
+                    <a:bodyPr/>
+                    <a:lstStyle/>
+                    <a:p>
+                      <a:r>
+                        <a:rPr sz="1400" b="0">
+                          <a:solidFill>
+                            <a:srgbClr val="000000"/>
+                          </a:solidFill>
+                          <a:latin typeface="微軟正黑體"/>
+                        </a:rPr>
+                        <a:t>半塌縮</a:t>
+                      </a:r>
+                    </a:p>
+                  </a:txBody>
+                  <a:tcPr>
+                    <a:solidFill>
+                      <a:srgbClr val="FFFFFF"/>
+                    </a:solidFill>
+                  </a:tcPr>
+                </a:tc>
+              </a:tr>
+              <a:tr h="384048">
+                <a:tc>
+                  <a:txBody>
+                    <a:bodyPr/>
+                    <a:lstStyle/>
+                    <a:p>
+                      <a:r>
+                        <a:rPr sz="1400" b="0">
+                          <a:solidFill>
+                            <a:srgbClr val="000000"/>
+                          </a:solidFill>
+                          <a:latin typeface="微軟正黑體"/>
+                        </a:rPr>
+                        <a:t>250</a:t>
+                      </a:r>
+                    </a:p>
+                  </a:txBody>
+                  <a:tcPr>
+                    <a:solidFill>
+                      <a:srgbClr val="FFFFFF"/>
+                    </a:solidFill>
+                  </a:tcPr>
+                </a:tc>
+                <a:tc>
+                  <a:txBody>
+                    <a:bodyPr/>
+                    <a:lstStyle/>
+                    <a:p>
+                      <a:r>
+                        <a:rPr sz="1400" b="0">
+                          <a:solidFill>
+                            <a:srgbClr val="000000"/>
+                          </a:solidFill>
+                          <a:latin typeface="微軟正黑體"/>
+                        </a:rPr>
+                        <a:t>448,919</a:t>
+                      </a:r>
+                    </a:p>
+                  </a:txBody>
+                  <a:tcPr>
+                    <a:solidFill>
+                      <a:srgbClr val="FFFFFF"/>
+                    </a:solidFill>
+                  </a:tcPr>
+                </a:tc>
+                <a:tc>
+                  <a:txBody>
+                    <a:bodyPr/>
+                    <a:lstStyle/>
+                    <a:p>
+                      <a:r>
+                        <a:rPr sz="1400" b="0">
+                          <a:solidFill>
+                            <a:srgbClr val="000000"/>
+                          </a:solidFill>
+                          <a:latin typeface="微軟正黑體"/>
+                        </a:rPr>
+                        <a:t>55.13%</a:t>
+                      </a:r>
+                    </a:p>
+                  </a:txBody>
+                  <a:tcPr>
+                    <a:solidFill>
+                      <a:srgbClr val="FFFFFF"/>
+                    </a:solidFill>
+                  </a:tcPr>
+                </a:tc>
+                <a:tc>
+                  <a:txBody>
+                    <a:bodyPr/>
+                    <a:lstStyle/>
+                    <a:p>
+                      <a:r>
+                        <a:rPr sz="1400" b="0">
+                          <a:solidFill>
+                            <a:srgbClr val="000000"/>
+                          </a:solidFill>
+                          <a:latin typeface="微軟正黑體"/>
+                        </a:rPr>
+                        <a:t>37.97%</a:t>
+                      </a:r>
+                    </a:p>
+                  </a:txBody>
+                  <a:tcPr>
+                    <a:solidFill>
+                      <a:srgbClr val="FFFFFF"/>
+                    </a:solidFill>
+                  </a:tcPr>
+                </a:tc>
+                <a:tc>
+                  <a:txBody>
+                    <a:bodyPr/>
+                    <a:lstStyle/>
+                    <a:p>
+                      <a:r>
+                        <a:rPr sz="1400" b="0">
+                          <a:solidFill>
+                            <a:srgbClr val="000000"/>
+                          </a:solidFill>
+                          <a:latin typeface="微軟正黑體"/>
+                        </a:rPr>
+                        <a:t>-7.3%</a:t>
+                      </a:r>
+                    </a:p>
+                  </a:txBody>
+                  <a:tcPr>
+                    <a:solidFill>
+                      <a:srgbClr val="FFFFFF"/>
+                    </a:solidFill>
+                  </a:tcPr>
+                </a:tc>
+                <a:tc>
+                  <a:txBody>
+                    <a:bodyPr/>
+                    <a:lstStyle/>
+                    <a:p>
+                      <a:r>
+                        <a:rPr sz="1400" b="0">
+                          <a:solidFill>
+                            <a:srgbClr val="000000"/>
+                          </a:solidFill>
+                          <a:latin typeface="微軟正黑體"/>
+                        </a:rPr>
+                        <a:t>塌縮</a:t>
+                      </a:r>
+                    </a:p>
+                  </a:txBody>
+                  <a:tcPr>
+                    <a:solidFill>
+                      <a:srgbClr val="FFFFFF"/>
+                    </a:solidFill>
+                  </a:tcPr>
+                </a:tc>
+              </a:tr>
+              <a:tr h="384048">
+                <a:tc>
+                  <a:txBody>
+                    <a:bodyPr/>
+                    <a:lstStyle/>
+                    <a:p>
+                      <a:r>
+                        <a:rPr sz="1400" b="0">
+                          <a:solidFill>
+                            <a:srgbClr val="000000"/>
+                          </a:solidFill>
+                          <a:latin typeface="微軟正黑體"/>
+                        </a:rPr>
+                        <a:t>300</a:t>
+                      </a:r>
+                    </a:p>
+                  </a:txBody>
+                  <a:tcPr>
+                    <a:solidFill>
+                      <a:srgbClr val="FFFFFF"/>
+                    </a:solidFill>
+                  </a:tcPr>
+                </a:tc>
+                <a:tc>
+                  <a:txBody>
+                    <a:bodyPr/>
+                    <a:lstStyle/>
+                    <a:p>
+                      <a:r>
+                        <a:rPr sz="1400" b="0">
+                          <a:solidFill>
+                            <a:srgbClr val="000000"/>
+                          </a:solidFill>
+                          <a:latin typeface="微軟正黑體"/>
+                        </a:rPr>
+                        <a:t>537,529</a:t>
+                      </a:r>
+                    </a:p>
+                  </a:txBody>
+                  <a:tcPr>
+                    <a:solidFill>
+                      <a:srgbClr val="FFFFFF"/>
+                    </a:solidFill>
+                  </a:tcPr>
+                </a:tc>
+                <a:tc>
+                  <a:txBody>
+                    <a:bodyPr/>
+                    <a:lstStyle/>
+                    <a:p>
+                      <a:r>
+                        <a:rPr sz="1400" b="0">
+                          <a:solidFill>
+                            <a:srgbClr val="000000"/>
+                          </a:solidFill>
+                          <a:latin typeface="微軟正黑體"/>
+                        </a:rPr>
+                        <a:t>52.02%</a:t>
+                      </a:r>
+                    </a:p>
+                  </a:txBody>
+                  <a:tcPr>
+                    <a:solidFill>
+                      <a:srgbClr val="FFFFFF"/>
+                    </a:solidFill>
+                  </a:tcPr>
+                </a:tc>
+                <a:tc>
+                  <a:txBody>
+                    <a:bodyPr/>
+                    <a:lstStyle/>
+                    <a:p>
+                      <a:r>
+                        <a:rPr sz="1400" b="0">
+                          <a:solidFill>
+                            <a:srgbClr val="000000"/>
+                          </a:solidFill>
+                          <a:latin typeface="微軟正黑體"/>
+                        </a:rPr>
+                        <a:t>43.62%</a:t>
+                      </a:r>
+                    </a:p>
+                  </a:txBody>
+                  <a:tcPr>
+                    <a:solidFill>
+                      <a:srgbClr val="FFFFFF"/>
+                    </a:solidFill>
+                  </a:tcPr>
+                </a:tc>
+                <a:tc>
+                  <a:txBody>
+                    <a:bodyPr/>
+                    <a:lstStyle/>
+                    <a:p>
+                      <a:r>
+                        <a:rPr sz="1400" b="0">
+                          <a:solidFill>
+                            <a:srgbClr val="000000"/>
+                          </a:solidFill>
+                          <a:latin typeface="微軟正黑體"/>
+                        </a:rPr>
+                        <a:t>-11.9%</a:t>
+                      </a:r>
+                    </a:p>
+                  </a:txBody>
+                  <a:tcPr>
+                    <a:solidFill>
+                      <a:srgbClr val="FFFFFF"/>
+                    </a:solidFill>
+                  </a:tcPr>
+                </a:tc>
+                <a:tc>
+                  <a:txBody>
+                    <a:bodyPr/>
+                    <a:lstStyle/>
+                    <a:p>
+                      <a:r>
+                        <a:rPr sz="1400" b="0">
+                          <a:solidFill>
+                            <a:srgbClr val="000000"/>
+                          </a:solidFill>
+                          <a:latin typeface="微軟正黑體"/>
+                        </a:rPr>
+                        <a:t>半塌縮</a:t>
+                      </a:r>
+                    </a:p>
+                  </a:txBody>
+                  <a:tcPr>
+                    <a:solidFill>
+                      <a:srgbClr val="FFFFFF"/>
+                    </a:solidFill>
+                  </a:tcPr>
+                </a:tc>
+              </a:tr>
+              <a:tr h="384048">
+                <a:tc>
+                  <a:txBody>
+                    <a:bodyPr/>
+                    <a:lstStyle/>
+                    <a:p>
+                      <a:r>
+                        <a:rPr sz="1400" b="0">
+                          <a:solidFill>
+                            <a:srgbClr val="000000"/>
+                          </a:solidFill>
+                          <a:latin typeface="微軟正黑體"/>
+                        </a:rPr>
+                        <a:t>350</a:t>
+                      </a:r>
+                    </a:p>
+                  </a:txBody>
+                  <a:tcPr>
+                    <a:solidFill>
+                      <a:srgbClr val="FFFFFF"/>
+                    </a:solidFill>
+                  </a:tcPr>
+                </a:tc>
+                <a:tc>
+                  <a:txBody>
+                    <a:bodyPr/>
+                    <a:lstStyle/>
+                    <a:p>
+                      <a:r>
+                        <a:rPr sz="1400" b="0">
+                          <a:solidFill>
+                            <a:srgbClr val="000000"/>
+                          </a:solidFill>
+                          <a:latin typeface="微軟正黑體"/>
+                        </a:rPr>
+                        <a:t>625,973</a:t>
+                      </a:r>
+                    </a:p>
+                  </a:txBody>
+                  <a:tcPr>
+                    <a:solidFill>
+                      <a:srgbClr val="FFFFFF"/>
+                    </a:solidFill>
+                  </a:tcPr>
+                </a:tc>
+                <a:tc>
+                  <a:txBody>
+                    <a:bodyPr/>
+                    <a:lstStyle/>
+                    <a:p>
+                      <a:r>
+                        <a:rPr sz="1400" b="0">
+                          <a:solidFill>
+                            <a:srgbClr val="000000"/>
+                          </a:solidFill>
+                          <a:latin typeface="微軟正黑體"/>
+                        </a:rPr>
+                        <a:t>55.90%</a:t>
+                      </a:r>
+                    </a:p>
+                  </a:txBody>
+                  <a:tcPr>
+                    <a:solidFill>
+                      <a:srgbClr val="FFFFFF"/>
+                    </a:solidFill>
+                  </a:tcPr>
+                </a:tc>
+                <a:tc>
+                  <a:txBody>
+                    <a:bodyPr/>
+                    <a:lstStyle/>
+                    <a:p>
+                      <a:r>
+                        <a:rPr sz="1400" b="0">
+                          <a:solidFill>
+                            <a:srgbClr val="000000"/>
+                          </a:solidFill>
+                          <a:latin typeface="微軟正黑體"/>
+                        </a:rPr>
+                        <a:t>36.08%</a:t>
+                      </a:r>
+                    </a:p>
+                  </a:txBody>
+                  <a:tcPr>
+                    <a:solidFill>
+                      <a:srgbClr val="FFFFFF"/>
+                    </a:solidFill>
+                  </a:tcPr>
+                </a:tc>
+                <a:tc>
+                  <a:txBody>
+                    <a:bodyPr/>
+                    <a:lstStyle/>
+                    <a:p>
+                      <a:r>
+                        <a:rPr sz="1400" b="0">
+                          <a:solidFill>
+                            <a:srgbClr val="000000"/>
+                          </a:solidFill>
+                          <a:latin typeface="微軟正黑體"/>
+                        </a:rPr>
+                        <a:t>-7.3%</a:t>
+                      </a:r>
+                    </a:p>
+                  </a:txBody>
+                  <a:tcPr>
+                    <a:solidFill>
+                      <a:srgbClr val="FFFFFF"/>
+                    </a:solidFill>
+                  </a:tcPr>
+                </a:tc>
+                <a:tc>
+                  <a:txBody>
+                    <a:bodyPr/>
+                    <a:lstStyle/>
+                    <a:p>
+                      <a:r>
+                        <a:rPr sz="1400" b="0">
+                          <a:solidFill>
+                            <a:srgbClr val="000000"/>
+                          </a:solidFill>
+                          <a:latin typeface="微軟正黑體"/>
+                        </a:rPr>
+                        <a:t>全塌縮</a:t>
+                      </a:r>
+                    </a:p>
+                  </a:txBody>
+                  <a:tcPr>
+                    <a:solidFill>
+                      <a:srgbClr val="FFFFFF"/>
+                    </a:solidFill>
+                  </a:tcPr>
+                </a:tc>
+              </a:tr>
+              <a:tr h="384048">
+                <a:tc>
+                  <a:txBody>
+                    <a:bodyPr/>
+                    <a:lstStyle/>
+                    <a:p>
+                      <a:r>
+                        <a:rPr sz="1400" b="0">
+                          <a:solidFill>
+                            <a:srgbClr val="000000"/>
+                          </a:solidFill>
+                          <a:latin typeface="微軟正黑體"/>
+                        </a:rPr>
+                        <a:t>400</a:t>
+                      </a:r>
+                    </a:p>
+                  </a:txBody>
+                  <a:tcPr>
+                    <a:solidFill>
+                      <a:srgbClr val="FFFFFF"/>
+                    </a:solidFill>
+                  </a:tcPr>
+                </a:tc>
+                <a:tc>
+                  <a:txBody>
+                    <a:bodyPr/>
+                    <a:lstStyle/>
+                    <a:p>
+                      <a:r>
+                        <a:rPr sz="1400" b="0">
+                          <a:solidFill>
+                            <a:srgbClr val="000000"/>
+                          </a:solidFill>
+                          <a:latin typeface="微軟正黑體"/>
+                        </a:rPr>
+                        <a:t>714,749</a:t>
+                      </a:r>
+                    </a:p>
+                  </a:txBody>
+                  <a:tcPr>
+                    <a:solidFill>
+                      <a:srgbClr val="FFFFFF"/>
+                    </a:solidFill>
+                  </a:tcPr>
+                </a:tc>
+                <a:tc>
+                  <a:txBody>
+                    <a:bodyPr/>
+                    <a:lstStyle/>
+                    <a:p>
+                      <a:r>
+                        <a:rPr sz="1400" b="0">
+                          <a:solidFill>
+                            <a:srgbClr val="000000"/>
+                          </a:solidFill>
+                          <a:latin typeface="微軟正黑體"/>
+                        </a:rPr>
+                        <a:t>46.22%</a:t>
+                      </a:r>
+                    </a:p>
+                  </a:txBody>
+                  <a:tcPr>
+                    <a:solidFill>
+                      <a:srgbClr val="FFFFFF"/>
+                    </a:solidFill>
+                  </a:tcPr>
+                </a:tc>
+                <a:tc>
+                  <a:txBody>
+                    <a:bodyPr/>
+                    <a:lstStyle/>
+                    <a:p>
+                      <a:r>
+                        <a:rPr sz="1400" b="0">
+                          <a:solidFill>
+                            <a:srgbClr val="000000"/>
+                          </a:solidFill>
+                          <a:latin typeface="微軟正黑體"/>
+                        </a:rPr>
+                        <a:t>45.69%</a:t>
+                      </a:r>
+                    </a:p>
+                  </a:txBody>
+                  <a:tcPr>
+                    <a:solidFill>
+                      <a:srgbClr val="FFFFFF"/>
+                    </a:solidFill>
+                  </a:tcPr>
+                </a:tc>
+                <a:tc>
+                  <a:txBody>
+                    <a:bodyPr/>
+                    <a:lstStyle/>
+                    <a:p>
+                      <a:r>
+                        <a:rPr sz="1400" b="0">
+                          <a:solidFill>
+                            <a:srgbClr val="000000"/>
+                          </a:solidFill>
+                          <a:latin typeface="微軟正黑體"/>
+                        </a:rPr>
+                        <a:t>-11.8%</a:t>
+                      </a:r>
+                    </a:p>
+                  </a:txBody>
+                  <a:tcPr>
+                    <a:solidFill>
+                      <a:srgbClr val="FFFFFF"/>
+                    </a:solidFill>
+                  </a:tcPr>
+                </a:tc>
+                <a:tc>
+                  <a:txBody>
+                    <a:bodyPr/>
+                    <a:lstStyle/>
+                    <a:p>
+                      <a:r>
+                        <a:rPr sz="1400" b="0">
+                          <a:solidFill>
+                            <a:srgbClr val="000000"/>
+                          </a:solidFill>
+                          <a:latin typeface="微軟正黑體"/>
+                        </a:rPr>
+                        <a:t>反向(偏押漲)</a:t>
+                      </a:r>
+                    </a:p>
+                  </a:txBody>
+                  <a:tcPr>
+                    <a:solidFill>
+                      <a:srgbClr val="FFFFFF"/>
+                    </a:solidFill>
+                  </a:tcPr>
+                </a:tc>
+              </a:tr>
+              <a:tr h="384048">
+                <a:tc>
+                  <a:txBody>
+                    <a:bodyPr/>
+                    <a:lstStyle/>
+                    <a:p>
+                      <a:r>
+                        <a:rPr sz="1400" b="0">
+                          <a:solidFill>
+                            <a:srgbClr val="000000"/>
+                          </a:solidFill>
+                          <a:latin typeface="微軟正黑體"/>
+                        </a:rPr>
+                        <a:t>450</a:t>
+                      </a:r>
+                    </a:p>
+                  </a:txBody>
+                  <a:tcPr>
+                    <a:solidFill>
+                      <a:srgbClr val="FFFFFF"/>
+                    </a:solidFill>
+                  </a:tcPr>
+                </a:tc>
+                <a:tc>
+                  <a:txBody>
+                    <a:bodyPr/>
+                    <a:lstStyle/>
+                    <a:p>
+                      <a:r>
+                        <a:rPr sz="1400" b="0">
+                          <a:solidFill>
+                            <a:srgbClr val="000000"/>
+                          </a:solidFill>
+                          <a:latin typeface="微軟正黑體"/>
+                        </a:rPr>
+                        <a:t>796,711</a:t>
+                      </a:r>
+                    </a:p>
+                  </a:txBody>
+                  <a:tcPr>
+                    <a:solidFill>
+                      <a:srgbClr val="FFFFFF"/>
+                    </a:solidFill>
+                  </a:tcPr>
+                </a:tc>
+                <a:tc>
+                  <a:txBody>
+                    <a:bodyPr/>
+                    <a:lstStyle/>
+                    <a:p>
+                      <a:r>
+                        <a:rPr sz="1400" b="0">
+                          <a:solidFill>
+                            <a:srgbClr val="000000"/>
+                          </a:solidFill>
+                          <a:latin typeface="微軟正黑體"/>
+                        </a:rPr>
+                        <a:t>56.16%</a:t>
+                      </a:r>
+                    </a:p>
+                  </a:txBody>
+                  <a:tcPr>
+                    <a:solidFill>
+                      <a:srgbClr val="FFFFFF"/>
+                    </a:solidFill>
+                  </a:tcPr>
+                </a:tc>
+                <a:tc>
+                  <a:txBody>
+                    <a:bodyPr/>
+                    <a:lstStyle/>
+                    <a:p>
+                      <a:r>
+                        <a:rPr sz="1400" b="0">
+                          <a:solidFill>
+                            <a:srgbClr val="000000"/>
+                          </a:solidFill>
+                          <a:latin typeface="微軟正黑體"/>
+                        </a:rPr>
+                        <a:t>36.00%</a:t>
+                      </a:r>
+                    </a:p>
+                  </a:txBody>
+                  <a:tcPr>
+                    <a:solidFill>
+                      <a:srgbClr val="FFFFFF"/>
+                    </a:solidFill>
+                  </a:tcPr>
+                </a:tc>
+                <a:tc>
+                  <a:txBody>
+                    <a:bodyPr/>
+                    <a:lstStyle/>
+                    <a:p>
+                      <a:r>
+                        <a:rPr sz="1400" b="0">
+                          <a:solidFill>
+                            <a:srgbClr val="000000"/>
+                          </a:solidFill>
+                          <a:latin typeface="微軟正黑體"/>
+                        </a:rPr>
+                        <a:t>-7.5%</a:t>
+                      </a:r>
+                    </a:p>
+                  </a:txBody>
+                  <a:tcPr>
+                    <a:solidFill>
+                      <a:srgbClr val="FFFFFF"/>
+                    </a:solidFill>
+                  </a:tcPr>
+                </a:tc>
+                <a:tc>
+                  <a:txBody>
+                    <a:bodyPr/>
+                    <a:lstStyle/>
+                    <a:p>
+                      <a:r>
+                        <a:rPr sz="1400" b="0">
+                          <a:solidFill>
+                            <a:srgbClr val="000000"/>
+                          </a:solidFill>
+                          <a:latin typeface="微軟正黑體"/>
+                        </a:rPr>
+                        <a:t>全塌縮</a:t>
+                      </a:r>
+                    </a:p>
+                  </a:txBody>
+                  <a:tcPr>
+                    <a:solidFill>
+                      <a:srgbClr val="FFFFFF"/>
+                    </a:solidFill>
+                  </a:tcPr>
+                </a:tc>
+              </a:tr>
+              <a:tr h="384048">
+                <a:tc>
+                  <a:txBody>
+                    <a:bodyPr/>
+                    <a:lstStyle/>
+                    <a:p>
+                      <a:r>
+                        <a:rPr sz="1400" b="0">
+                          <a:solidFill>
+                            <a:srgbClr val="000000"/>
+                          </a:solidFill>
+                          <a:latin typeface="微軟正黑體"/>
+                        </a:rPr>
+                        <a:t>500</a:t>
+                      </a:r>
+                    </a:p>
+                  </a:txBody>
+                  <a:tcPr>
+                    <a:solidFill>
+                      <a:srgbClr val="FFFFFF"/>
+                    </a:solidFill>
+                  </a:tcPr>
+                </a:tc>
+                <a:tc>
+                  <a:txBody>
+                    <a:bodyPr/>
+                    <a:lstStyle/>
+                    <a:p>
+                      <a:r>
+                        <a:rPr sz="1400" b="0">
+                          <a:solidFill>
+                            <a:srgbClr val="000000"/>
+                          </a:solidFill>
+                          <a:latin typeface="微軟正黑體"/>
+                        </a:rPr>
+                        <a:t>885,162</a:t>
+                      </a:r>
+                    </a:p>
+                  </a:txBody>
+                  <a:tcPr>
+                    <a:solidFill>
+                      <a:srgbClr val="FFFFFF"/>
+                    </a:solidFill>
+                  </a:tcPr>
+                </a:tc>
+                <a:tc>
+                  <a:txBody>
+                    <a:bodyPr/>
+                    <a:lstStyle/>
+                    <a:p>
+                      <a:r>
+                        <a:rPr sz="1400" b="0">
+                          <a:solidFill>
+                            <a:srgbClr val="000000"/>
+                          </a:solidFill>
+                          <a:latin typeface="微軟正黑體"/>
+                        </a:rPr>
+                        <a:t>56.09%</a:t>
+                      </a:r>
+                    </a:p>
+                  </a:txBody>
+                  <a:tcPr>
+                    <a:solidFill>
+                      <a:srgbClr val="FFFFFF"/>
+                    </a:solidFill>
+                  </a:tcPr>
+                </a:tc>
+                <a:tc>
+                  <a:txBody>
+                    <a:bodyPr/>
+                    <a:lstStyle/>
+                    <a:p>
+                      <a:r>
+                        <a:rPr sz="1400" b="0">
+                          <a:solidFill>
+                            <a:srgbClr val="000000"/>
+                          </a:solidFill>
+                          <a:latin typeface="微軟正黑體"/>
+                        </a:rPr>
+                        <a:t>35.93%</a:t>
+                      </a:r>
+                    </a:p>
+                  </a:txBody>
+                  <a:tcPr>
+                    <a:solidFill>
+                      <a:srgbClr val="FFFFFF"/>
+                    </a:solidFill>
+                  </a:tcPr>
+                </a:tc>
+                <a:tc>
+                  <a:txBody>
+                    <a:bodyPr/>
+                    <a:lstStyle/>
+                    <a:p>
+                      <a:r>
+                        <a:rPr sz="1400" b="0">
+                          <a:solidFill>
+                            <a:srgbClr val="000000"/>
+                          </a:solidFill>
+                          <a:latin typeface="微軟正黑體"/>
+                        </a:rPr>
+                        <a:t>-8.8%</a:t>
+                      </a:r>
+                    </a:p>
+                  </a:txBody>
+                  <a:tcPr>
+                    <a:solidFill>
+                      <a:srgbClr val="FFFFFF"/>
+                    </a:solidFill>
+                  </a:tcPr>
+                </a:tc>
+                <a:tc>
+                  <a:txBody>
+                    <a:bodyPr/>
+                    <a:lstStyle/>
+                    <a:p>
+                      <a:r>
+                        <a:rPr sz="1400" b="0">
+                          <a:solidFill>
+                            <a:srgbClr val="000000"/>
+                          </a:solidFill>
+                          <a:latin typeface="微軟正黑體"/>
+                        </a:rPr>
+                        <a:t>全塌縮(零漲預測)</a:t>
+                      </a:r>
+                    </a:p>
+                  </a:txBody>
+                  <a:tcPr>
+                    <a:solidFill>
+                      <a:srgbClr val="FFFFFF"/>
+                    </a:solidFill>
+                  </a:tcPr>
+                </a:tc>
+              </a:tr>
+            </a:tbl>
+          </a:graphicData>
+        </a:graphic>
+      </p:graphicFrame>
+      <p:sp>
+        <p:nvSpPr>
+          <p:cNvPr id="4" name="TextBox 3"/>
           <p:cNvSpPr txBox="1"/>
           <p:nvPr/>
         </p:nvSpPr>
         <p:spPr>
           <a:xfrm>
-            <a:off x="731520" y="1371600"/>
-            <a:ext cx="10789920" cy="5120640"/>
+            <a:off x="731520" y="5989320"/>
+            <a:ext cx="10789920" cy="640080"/>
           </a:xfrm>
           <a:prstGeom prst="rect">
             <a:avLst/>
@@ -3911,67 +4859,14 @@
           </a:bodyPr>
           <a:lstStyle/>
           <a:p>
-            <a:pPr>
-              <a:spcAft>
-                <a:spcPts val="1000"/>
-              </a:spcAft>
-            </a:pPr>
-            <a:r>
-              <a:rPr sz="2200">
+            <a:r>
+              <a:rPr sz="1600">
                 <a:solidFill>
                   <a:srgbClr val="000000"/>
                 </a:solidFill>
                 <a:latin typeface="微軟正黑體"/>
               </a:rPr>
-              <a:t>樣本增加 10 倍,Acc 46~56 徘徊、F1 macro 35.9~47.4 兩態震盪 — 無任何規模趨勢</a:t>
-            </a:r>
-          </a:p>
-          <a:p>
-            <a:pPr>
-              <a:spcAft>
-                <a:spcPts val="1000"/>
-              </a:spcAft>
-            </a:pPr>
-            <a:r>
-              <a:rPr sz="2200">
-                <a:solidFill>
-                  <a:srgbClr val="000000"/>
-                </a:solidFill>
-                <a:latin typeface="微軟正黑體"/>
-              </a:rPr>
-              <a:t>Acc 的「上升」是假象:大池子「跌」類比例較高,全押跌的地板就更高</a:t>
-            </a:r>
-          </a:p>
-          <a:p>
-            <a:pPr>
-              <a:spcAft>
-                <a:spcPts val="1000"/>
-              </a:spcAft>
-            </a:pPr>
-            <a:r>
-              <a:rPr sz="2200">
-                <a:solidFill>
-                  <a:srgbClr val="000000"/>
-                </a:solidFill>
-                <a:latin typeface="微軟正黑體"/>
-              </a:rPr>
-              <a:t>n=500 時模型完全塌縮:一張「漲」的預測都不出(F1 macro 35.9% = 數學下限)</a:t>
-            </a:r>
-          </a:p>
-          <a:p>
-            <a:pPr>
-              <a:spcAft>
-                <a:spcPts val="1000"/>
-              </a:spcAft>
-            </a:pPr>
-            <a:r>
-              <a:rPr sz="2200">
-                <a:solidFill>
-                  <a:srgbClr val="000000"/>
-                </a:solidFill>
-                <a:latin typeface="微軟正黑體"/>
-              </a:rPr>
-              <a:t>回測 10 輪有 9 輪輸給等權買入持有</a:t>
+              <a:t>樣本增加 10 倍無改善趨勢;F1 macro 在「全押跌 ~36%」與「均衡亂猜 ~47%」兩態間震盪</a:t>
             </a:r>
           </a:p>
         </p:txBody>
@@ -3984,7 +4879,7 @@
 </p:sld>
 </file>
 
-<file path=ppt/slides/slide6.xml><?xml version="1.0" encoding="utf-8"?>
+<file path=ppt/slides/slide4.xml><?xml version="1.0" encoding="utf-8"?>
 <p:sld xmlns:a="http://schemas.openxmlformats.org/drawingml/2006/main" xmlns:p="http://schemas.openxmlformats.org/presentationml/2006/main" xmlns:r="http://schemas.openxmlformats.org/officeDocument/2006/relationships">
   <p:cSld>
     <p:spTree>
@@ -4023,7 +4918,7 @@
                 </a:solidFill>
                 <a:latin typeface="微軟正黑體"/>
               </a:rPr>
-              <a:t>主軸二:分族群(電子 455 檔盤點 + 四組實驗)</a:t>
+              <a:t>分族群:結果</a:t>
             </a:r>
           </a:p>
         </p:txBody>
@@ -4037,7 +4932,7 @@
         <p:spPr>
           <a:xfrm>
             <a:off x="731520" y="1234440"/>
-            <a:ext cx="10789920" cy="914400"/>
+            <a:ext cx="10789920" cy="640080"/>
           </a:xfrm>
           <a:prstGeom prst="rect">
             <a:avLst/>
@@ -4045,19 +4940,19 @@
           <a:noFill/>
         </p:spPr>
         <p:txBody>
-          <a:bodyPr wrap="none">
+          <a:bodyPr wrap="square">
             <a:spAutoFit/>
           </a:bodyPr>
           <a:lstStyle/>
           <a:p>
             <a:r>
-              <a:rPr sz="1800">
+              <a:rPr sz="1600">
                 <a:solidFill>
                   <a:srgbClr val="000000"/>
                 </a:solidFill>
                 <a:latin typeface="微軟正黑體"/>
               </a:rPr>
-              <a:t>•  盤點:上市電子相關 455 檔(零組件 104、半導體 96、光電 68、電腦週邊 64、其他 46、通信 45、通路 21、資服 11)</a:t>
+              <a:t>電子族群盤點:上市電子相關共 455 檔(零組件 104、半導體 96、光電 68、電腦週邊 64、其他 46、通信 45、通路 21、資服 11)</a:t>
             </a:r>
           </a:p>
         </p:txBody>
@@ -4071,7 +4966,7 @@
           <p:nvPr/>
         </p:nvGraphicFramePr>
         <p:xfrm>
-          <a:off x="731520" y="2286000"/>
+          <a:off x="731520" y="2194560"/>
           <a:ext cx="10698480" cy="1920240"/>
         </p:xfrm>
         <a:graphic>
@@ -4081,12 +4976,13 @@
                 <a:tableStyleId>{5C22544A-7EE6-4342-B048-85BDC9FD1C3A}</a:tableStyleId>
               </a:tblPr>
               <a:tblGrid>
-                <a:gridCol w="2377440"/>
-                <a:gridCol w="1097280"/>
+                <a:gridCol w="2194560"/>
+                <a:gridCol w="1005840"/>
+                <a:gridCol w="1280160"/>
                 <a:gridCol w="1463040"/>
-                <a:gridCol w="1645920"/>
-                <a:gridCol w="1554480"/>
-                <a:gridCol w="2560320"/>
+                <a:gridCol w="1280160"/>
+                <a:gridCol w="1371600"/>
+                <a:gridCol w="2103120"/>
               </a:tblGrid>
               <a:tr h="384048">
                 <a:tc>
@@ -4095,7 +4991,7 @@
                     <a:lstStyle/>
                     <a:p>
                       <a:r>
-                        <a:rPr sz="1600" b="1">
+                        <a:rPr sz="1500" b="1">
                           <a:solidFill>
                             <a:srgbClr val="000000"/>
                           </a:solidFill>
@@ -4117,7 +5013,7 @@
                     <a:lstStyle/>
                     <a:p>
                       <a:r>
-                        <a:rPr sz="1600" b="1">
+                        <a:rPr sz="1500" b="1">
                           <a:solidFill>
                             <a:srgbClr val="000000"/>
                           </a:solidFill>
@@ -4139,7 +5035,7 @@
                     <a:lstStyle/>
                     <a:p>
                       <a:r>
-                        <a:rPr sz="1600" b="1">
+                        <a:rPr sz="1500" b="1">
                           <a:solidFill>
                             <a:srgbClr val="000000"/>
                           </a:solidFill>
@@ -4161,7 +5057,7 @@
                     <a:lstStyle/>
                     <a:p>
                       <a:r>
-                        <a:rPr sz="1600" b="1">
+                        <a:rPr sz="1500" b="1">
                           <a:solidFill>
                             <a:srgbClr val="000000"/>
                           </a:solidFill>
@@ -4183,7 +5079,29 @@
                     <a:lstStyle/>
                     <a:p>
                       <a:r>
-                        <a:rPr sz="1600" b="1">
+                        <a:rPr sz="1500" b="1">
+                          <a:solidFill>
+                            <a:srgbClr val="000000"/>
+                          </a:solidFill>
+                          <a:latin typeface="微軟正黑體"/>
+                        </a:rPr>
+                        <a:t>F1(漲)</a:t>
+                      </a:r>
+                    </a:p>
+                  </a:txBody>
+                  <a:tcPr>
+                    <a:solidFill>
+                      <a:srgbClr val="EFEEEA"/>
+                    </a:solidFill>
+                  </a:tcPr>
+                </a:tc>
+                <a:tc>
+                  <a:txBody>
+                    <a:bodyPr/>
+                    <a:lstStyle/>
+                    <a:p>
+                      <a:r>
+                        <a:rPr sz="1500" b="1">
                           <a:solidFill>
                             <a:srgbClr val="000000"/>
                           </a:solidFill>
@@ -4205,7 +5123,7 @@
                     <a:lstStyle/>
                     <a:p>
                       <a:r>
-                        <a:rPr sz="1600" b="1">
+                        <a:rPr sz="1500" b="1">
                           <a:solidFill>
                             <a:srgbClr val="000000"/>
                           </a:solidFill>
@@ -4229,7 +5147,7 @@
                     <a:lstStyle/>
                     <a:p>
                       <a:r>
-                        <a:rPr sz="1600" b="0">
+                        <a:rPr sz="1500" b="0">
                           <a:solidFill>
                             <a:srgbClr val="000000"/>
                           </a:solidFill>
@@ -4251,7 +5169,7 @@
                     <a:lstStyle/>
                     <a:p>
                       <a:r>
-                        <a:rPr sz="1600" b="0">
+                        <a:rPr sz="1500" b="0">
                           <a:solidFill>
                             <a:srgbClr val="000000"/>
                           </a:solidFill>
@@ -4273,7 +5191,7 @@
                     <a:lstStyle/>
                     <a:p>
                       <a:r>
-                        <a:rPr sz="1600" b="0">
+                        <a:rPr sz="1500" b="0">
                           <a:solidFill>
                             <a:srgbClr val="000000"/>
                           </a:solidFill>
@@ -4295,7 +5213,7 @@
                     <a:lstStyle/>
                     <a:p>
                       <a:r>
-                        <a:rPr sz="1600" b="0">
+                        <a:rPr sz="1500" b="0">
                           <a:solidFill>
                             <a:srgbClr val="000000"/>
                           </a:solidFill>
@@ -4317,7 +5235,29 @@
                     <a:lstStyle/>
                     <a:p>
                       <a:r>
-                        <a:rPr sz="1600" b="0">
+                        <a:rPr sz="1500" b="0">
+                          <a:solidFill>
+                            <a:srgbClr val="000000"/>
+                          </a:solidFill>
+                          <a:latin typeface="微軟正黑體"/>
+                        </a:rPr>
+                        <a:t>49.4%</a:t>
+                      </a:r>
+                    </a:p>
+                  </a:txBody>
+                  <a:tcPr>
+                    <a:solidFill>
+                      <a:srgbClr val="FFFFFF"/>
+                    </a:solidFill>
+                  </a:tcPr>
+                </a:tc>
+                <a:tc>
+                  <a:txBody>
+                    <a:bodyPr/>
+                    <a:lstStyle/>
+                    <a:p>
+                      <a:r>
+                        <a:rPr sz="1500" b="0">
                           <a:solidFill>
                             <a:srgbClr val="000000"/>
                           </a:solidFill>
@@ -4339,7 +5279,7 @@
                     <a:lstStyle/>
                     <a:p>
                       <a:r>
-                        <a:rPr sz="1600" b="0">
+                        <a:rPr sz="1500" b="0">
                           <a:solidFill>
                             <a:srgbClr val="000000"/>
                           </a:solidFill>
@@ -4363,7 +5303,7 @@
                     <a:lstStyle/>
                     <a:p>
                       <a:r>
-                        <a:rPr sz="1600" b="0">
+                        <a:rPr sz="1500" b="0">
                           <a:solidFill>
                             <a:srgbClr val="000000"/>
                           </a:solidFill>
@@ -4385,7 +5325,7 @@
                     <a:lstStyle/>
                     <a:p>
                       <a:r>
-                        <a:rPr sz="1600" b="0">
+                        <a:rPr sz="1500" b="0">
                           <a:solidFill>
                             <a:srgbClr val="000000"/>
                           </a:solidFill>
@@ -4407,7 +5347,7 @@
                     <a:lstStyle/>
                     <a:p>
                       <a:r>
-                        <a:rPr sz="1600" b="0">
+                        <a:rPr sz="1500" b="0">
                           <a:solidFill>
                             <a:srgbClr val="000000"/>
                           </a:solidFill>
@@ -4429,7 +5369,7 @@
                     <a:lstStyle/>
                     <a:p>
                       <a:r>
-                        <a:rPr sz="1600" b="0">
+                        <a:rPr sz="1500" b="0">
                           <a:solidFill>
                             <a:srgbClr val="000000"/>
                           </a:solidFill>
@@ -4451,7 +5391,29 @@
                     <a:lstStyle/>
                     <a:p>
                       <a:r>
-                        <a:rPr sz="1600" b="0">
+                        <a:rPr sz="1500" b="0">
+                          <a:solidFill>
+                            <a:srgbClr val="000000"/>
+                          </a:solidFill>
+                          <a:latin typeface="微軟正黑體"/>
+                        </a:rPr>
+                        <a:t>58.4%</a:t>
+                      </a:r>
+                    </a:p>
+                  </a:txBody>
+                  <a:tcPr>
+                    <a:solidFill>
+                      <a:srgbClr val="FFFFFF"/>
+                    </a:solidFill>
+                  </a:tcPr>
+                </a:tc>
+                <a:tc>
+                  <a:txBody>
+                    <a:bodyPr/>
+                    <a:lstStyle/>
+                    <a:p>
+                      <a:r>
+                        <a:rPr sz="1500" b="0">
                           <a:solidFill>
                             <a:srgbClr val="000000"/>
                           </a:solidFill>
@@ -4473,7 +5435,7 @@
                     <a:lstStyle/>
                     <a:p>
                       <a:r>
-                        <a:rPr sz="1600" b="0">
+                        <a:rPr sz="1500" b="0">
                           <a:solidFill>
                             <a:srgbClr val="000000"/>
                           </a:solidFill>
@@ -4497,7 +5459,7 @@
                     <a:lstStyle/>
                     <a:p>
                       <a:r>
-                        <a:rPr sz="1600" b="0">
+                        <a:rPr sz="1500" b="0">
                           <a:solidFill>
                             <a:srgbClr val="000000"/>
                           </a:solidFill>
@@ -4519,7 +5481,7 @@
                     <a:lstStyle/>
                     <a:p>
                       <a:r>
-                        <a:rPr sz="1600" b="0">
+                        <a:rPr sz="1500" b="0">
                           <a:solidFill>
                             <a:srgbClr val="000000"/>
                           </a:solidFill>
@@ -4541,7 +5503,7 @@
                     <a:lstStyle/>
                     <a:p>
                       <a:r>
-                        <a:rPr sz="1600" b="0">
+                        <a:rPr sz="1500" b="0">
                           <a:solidFill>
                             <a:srgbClr val="000000"/>
                           </a:solidFill>
@@ -4563,7 +5525,7 @@
                     <a:lstStyle/>
                     <a:p>
                       <a:r>
-                        <a:rPr sz="1600" b="0">
+                        <a:rPr sz="1500" b="0">
                           <a:solidFill>
                             <a:srgbClr val="000000"/>
                           </a:solidFill>
@@ -4585,7 +5547,29 @@
                     <a:lstStyle/>
                     <a:p>
                       <a:r>
-                        <a:rPr sz="1600" b="0">
+                        <a:rPr sz="1500" b="0">
+                          <a:solidFill>
+                            <a:srgbClr val="000000"/>
+                          </a:solidFill>
+                          <a:latin typeface="微軟正黑體"/>
+                        </a:rPr>
+                        <a:t>53.6%</a:t>
+                      </a:r>
+                    </a:p>
+                  </a:txBody>
+                  <a:tcPr>
+                    <a:solidFill>
+                      <a:srgbClr val="FFFFFF"/>
+                    </a:solidFill>
+                  </a:tcPr>
+                </a:tc>
+                <a:tc>
+                  <a:txBody>
+                    <a:bodyPr/>
+                    <a:lstStyle/>
+                    <a:p>
+                      <a:r>
+                        <a:rPr sz="1500" b="0">
                           <a:solidFill>
                             <a:srgbClr val="000000"/>
                           </a:solidFill>
@@ -4607,7 +5591,7 @@
                     <a:lstStyle/>
                     <a:p>
                       <a:r>
-                        <a:rPr sz="1600" b="0">
+                        <a:rPr sz="1500" b="0">
                           <a:solidFill>
                             <a:srgbClr val="000000"/>
                           </a:solidFill>
@@ -4631,7 +5615,7 @@
                     <a:lstStyle/>
                     <a:p>
                       <a:r>
-                        <a:rPr sz="1600" b="0">
+                        <a:rPr sz="1500" b="0">
                           <a:solidFill>
                             <a:srgbClr val="000000"/>
                           </a:solidFill>
@@ -4653,7 +5637,7 @@
                     <a:lstStyle/>
                     <a:p>
                       <a:r>
-                        <a:rPr sz="1600" b="0">
+                        <a:rPr sz="1500" b="0">
                           <a:solidFill>
                             <a:srgbClr val="000000"/>
                           </a:solidFill>
@@ -4675,7 +5659,7 @@
                     <a:lstStyle/>
                     <a:p>
                       <a:r>
-                        <a:rPr sz="1600" b="0">
+                        <a:rPr sz="1500" b="0">
                           <a:solidFill>
                             <a:srgbClr val="000000"/>
                           </a:solidFill>
@@ -4697,7 +5681,7 @@
                     <a:lstStyle/>
                     <a:p>
                       <a:r>
-                        <a:rPr sz="1600" b="0">
+                        <a:rPr sz="1500" b="0">
                           <a:solidFill>
                             <a:srgbClr val="000000"/>
                           </a:solidFill>
@@ -4719,7 +5703,29 @@
                     <a:lstStyle/>
                     <a:p>
                       <a:r>
-                        <a:rPr sz="1600" b="0">
+                        <a:rPr sz="1500" b="0">
+                          <a:solidFill>
+                            <a:srgbClr val="000000"/>
+                          </a:solidFill>
+                          <a:latin typeface="微軟正黑體"/>
+                        </a:rPr>
+                        <a:t>8.8%</a:t>
+                      </a:r>
+                    </a:p>
+                  </a:txBody>
+                  <a:tcPr>
+                    <a:solidFill>
+                      <a:srgbClr val="FFFFFF"/>
+                    </a:solidFill>
+                  </a:tcPr>
+                </a:tc>
+                <a:tc>
+                  <a:txBody>
+                    <a:bodyPr/>
+                    <a:lstStyle/>
+                    <a:p>
+                      <a:r>
+                        <a:rPr sz="1500" b="0">
                           <a:solidFill>
                             <a:srgbClr val="000000"/>
                           </a:solidFill>
@@ -4741,7 +5747,7 @@
                     <a:lstStyle/>
                     <a:p>
                       <a:r>
-                        <a:rPr sz="1600" b="0">
+                        <a:rPr sz="1500" b="0">
                           <a:solidFill>
                             <a:srgbClr val="000000"/>
                           </a:solidFill>
@@ -4771,7 +5777,7 @@
         <p:spPr>
           <a:xfrm>
             <a:off x="731520" y="4846320"/>
-            <a:ext cx="10789920" cy="1097280"/>
+            <a:ext cx="10789920" cy="640080"/>
           </a:xfrm>
           <a:prstGeom prst="rect">
             <a:avLst/>
@@ -4779,305 +5785,11 @@
           <a:noFill/>
         </p:spPr>
         <p:txBody>
-          <a:bodyPr wrap="none">
-            <a:spAutoFit/>
-          </a:bodyPr>
-          <a:lstStyle/>
-          <a:p>
-            <a:r>
-              <a:rPr sz="1900">
-                <a:solidFill>
-                  <a:srgbClr val="000000"/>
-                </a:solidFill>
-                <a:latin typeface="微軟正黑體"/>
-              </a:rPr>
-              <a:t>•  沒有任何一組同時做到「Acc 高於類別先驗 + 預測均衡」;同質性最高的半導體反而最差 — 分族群不改變天花板</a:t>
-            </a:r>
-          </a:p>
-        </p:txBody>
-      </p:sp>
-    </p:spTree>
-  </p:cSld>
-  <p:clrMapOvr>
-    <a:masterClrMapping/>
-  </p:clrMapOvr>
-</p:sld>
-</file>
-
-<file path=ppt/slides/slide7.xml><?xml version="1.0" encoding="utf-8"?>
-<p:sld xmlns:a="http://schemas.openxmlformats.org/drawingml/2006/main" xmlns:p="http://schemas.openxmlformats.org/presentationml/2006/main" xmlns:r="http://schemas.openxmlformats.org/officeDocument/2006/relationships">
-  <p:cSld>
-    <p:spTree>
-      <p:nvGrpSpPr>
-        <p:cNvPr id="1" name=""/>
-        <p:cNvGrpSpPr/>
-        <p:nvPr/>
-      </p:nvGrpSpPr>
-      <p:grpSpPr/>
-      <p:sp>
-        <p:nvSpPr>
-          <p:cNvPr id="2" name="TextBox 1"/>
-          <p:cNvSpPr txBox="1"/>
-          <p:nvPr/>
-        </p:nvSpPr>
-        <p:spPr>
-          <a:xfrm>
-            <a:off x="548640" y="365760"/>
-            <a:ext cx="11064240" cy="914400"/>
-          </a:xfrm>
-          <a:prstGeom prst="rect">
-            <a:avLst/>
-          </a:prstGeom>
-          <a:noFill/>
-        </p:spPr>
-        <p:txBody>
-          <a:bodyPr wrap="none">
-            <a:spAutoFit/>
-          </a:bodyPr>
-          <a:lstStyle/>
-          <a:p>
-            <a:r>
-              <a:rPr sz="3200" b="1">
-                <a:solidFill>
-                  <a:srgbClr val="000000"/>
-                </a:solidFill>
-                <a:latin typeface="微軟正黑體"/>
-              </a:rPr>
-              <a:t>總結論</a:t>
-            </a:r>
-          </a:p>
-        </p:txBody>
-      </p:sp>
-      <p:sp>
-        <p:nvSpPr>
-          <p:cNvPr id="3" name="TextBox 2"/>
-          <p:cNvSpPr txBox="1"/>
-          <p:nvPr/>
-        </p:nvSpPr>
-        <p:spPr>
-          <a:xfrm>
-            <a:off x="731520" y="1371600"/>
-            <a:ext cx="10789920" cy="5120640"/>
-          </a:xfrm>
-          <a:prstGeom prst="rect">
-            <a:avLst/>
-          </a:prstGeom>
-          <a:noFill/>
-        </p:spPr>
-        <p:txBody>
           <a:bodyPr wrap="square">
             <a:spAutoFit/>
           </a:bodyPr>
           <a:lstStyle/>
           <a:p>
-            <a:pPr>
-              <a:spcAft>
-                <a:spcPts val="1000"/>
-              </a:spcAft>
-            </a:pPr>
-            <a:r>
-              <a:rPr sz="2400">
-                <a:solidFill>
-                  <a:srgbClr val="000000"/>
-                </a:solidFill>
-                <a:latin typeface="微軟正黑體"/>
-              </a:rPr>
-              <a:t>否證鏈四維完整:</a:t>
-            </a:r>
-          </a:p>
-          <a:p>
-            <a:pPr lvl="1">
-              <a:spcAft>
-                <a:spcPts val="1000"/>
-              </a:spcAft>
-            </a:pPr>
-            <a:r>
-              <a:rPr sz="2100">
-                <a:solidFill>
-                  <a:srgbClr val="000000"/>
-                </a:solidFill>
-                <a:latin typeface="微軟正黑體"/>
-              </a:rPr>
-              <a:t>換市場(上證 50)✗   掃參數(論文全網格)✗   加資料量(10 倍)✗   分族群 ✗</a:t>
-            </a:r>
-          </a:p>
-          <a:p>
-            <a:pPr>
-              <a:spcAft>
-                <a:spcPts val="1000"/>
-              </a:spcAft>
-            </a:pPr>
-            <a:r>
-              <a:rPr sz="2100">
-                <a:solidFill>
-                  <a:srgbClr val="000000"/>
-                </a:solidFill>
-                <a:latin typeface="微軟正黑體"/>
-              </a:rPr>
-              <a:t>無洩漏協定下,Chart-GCN 於 1 日漲跌標籤與 XGBoost、擲硬幣無法區分</a:t>
-            </a:r>
-          </a:p>
-          <a:p>
-            <a:pPr>
-              <a:spcAft>
-                <a:spcPts val="1000"/>
-              </a:spcAft>
-            </a:pPr>
-            <a:r>
-              <a:rPr sz="2100">
-                <a:solidFill>
-                  <a:srgbClr val="000000"/>
-                </a:solidFill>
-                <a:latin typeface="微軟正黑體"/>
-              </a:rPr>
-              <a:t>瓶頸 = 1 日 close-to-close 標籤的資訊含量,不是模型 / 參數 / 資料量 / 股票組成</a:t>
-            </a:r>
-          </a:p>
-        </p:txBody>
-      </p:sp>
-    </p:spTree>
-  </p:cSld>
-  <p:clrMapOvr>
-    <a:masterClrMapping/>
-  </p:clrMapOvr>
-</p:sld>
-</file>
-
-<file path=ppt/slides/slide8.xml><?xml version="1.0" encoding="utf-8"?>
-<p:sld xmlns:a="http://schemas.openxmlformats.org/drawingml/2006/main" xmlns:p="http://schemas.openxmlformats.org/presentationml/2006/main" xmlns:r="http://schemas.openxmlformats.org/officeDocument/2006/relationships">
-  <p:cSld>
-    <p:spTree>
-      <p:nvGrpSpPr>
-        <p:cNvPr id="1" name=""/>
-        <p:cNvGrpSpPr/>
-        <p:nvPr/>
-      </p:nvGrpSpPr>
-      <p:grpSpPr/>
-      <p:sp>
-        <p:nvSpPr>
-          <p:cNvPr id="2" name="TextBox 1"/>
-          <p:cNvSpPr txBox="1"/>
-          <p:nvPr/>
-        </p:nvSpPr>
-        <p:spPr>
-          <a:xfrm>
-            <a:off x="548640" y="365760"/>
-            <a:ext cx="11064240" cy="914400"/>
-          </a:xfrm>
-          <a:prstGeom prst="rect">
-            <a:avLst/>
-          </a:prstGeom>
-          <a:noFill/>
-        </p:spPr>
-        <p:txBody>
-          <a:bodyPr wrap="none">
-            <a:spAutoFit/>
-          </a:bodyPr>
-          <a:lstStyle/>
-          <a:p>
-            <a:r>
-              <a:rPr sz="3200" b="1">
-                <a:solidFill>
-                  <a:srgbClr val="000000"/>
-                </a:solidFill>
-                <a:latin typeface="微軟正黑體"/>
-              </a:rPr>
-              <a:t>下一步(待討論)</a:t>
-            </a:r>
-          </a:p>
-        </p:txBody>
-      </p:sp>
-      <p:sp>
-        <p:nvSpPr>
-          <p:cNvPr id="3" name="TextBox 2"/>
-          <p:cNvSpPr txBox="1"/>
-          <p:nvPr/>
-        </p:nvSpPr>
-        <p:spPr>
-          <a:xfrm>
-            <a:off x="731520" y="1371600"/>
-            <a:ext cx="10789920" cy="5120640"/>
-          </a:xfrm>
-          <a:prstGeom prst="rect">
-            <a:avLst/>
-          </a:prstGeom>
-          <a:noFill/>
-        </p:spPr>
-        <p:txBody>
-          <a:bodyPr wrap="square">
-            <a:spAutoFit/>
-          </a:bodyPr>
-          <a:lstStyle/>
-          <a:p>
-            <a:pPr>
-              <a:spcAft>
-                <a:spcPts val="1000"/>
-              </a:spcAft>
-            </a:pPr>
-            <a:r>
-              <a:rPr sz="2100">
-                <a:solidFill>
-                  <a:srgbClr val="000000"/>
-                </a:solidFill>
-                <a:latin typeface="微軟正黑體"/>
-              </a:rPr>
-              <a:t>1. 換更可預測的題目:5 日標籤(降噪)、橫斷面相對強弱標籤</a:t>
-            </a:r>
-          </a:p>
-          <a:p>
-            <a:pPr>
-              <a:spcAft>
-                <a:spcPts val="1000"/>
-              </a:spcAft>
-            </a:pPr>
-            <a:r>
-              <a:rPr sz="2100">
-                <a:solidFill>
-                  <a:srgbClr val="000000"/>
-                </a:solidFill>
-                <a:latin typeface="微軟正黑體"/>
-              </a:rPr>
-              <a:t>2. 回到融合主軸:main(AE+OCSVM)× Chart-GCN</a:t>
-            </a:r>
-          </a:p>
-          <a:p>
-            <a:pPr>
-              <a:spcAft>
-                <a:spcPts val="1000"/>
-              </a:spcAft>
-            </a:pPr>
-            <a:r>
-              <a:rPr sz="2100">
-                <a:solidFill>
-                  <a:srgbClr val="000000"/>
-                </a:solidFill>
-                <a:latin typeface="微軟正黑體"/>
-              </a:rPr>
-              <a:t>3. 引入新資訊源:籌碼 / 分點特徵 — 價格衍生特徵的資訊已證明不足</a:t>
-            </a:r>
-          </a:p>
-          <a:p>
-            <a:pPr>
-              <a:spcAft>
-                <a:spcPts val="1000"/>
-              </a:spcAft>
-            </a:pPr>
-            <a:r>
-              <a:rPr sz="1400">
-                <a:solidFill>
-                  <a:srgbClr val="000000"/>
-                </a:solidFill>
-                <a:latin typeface="微軟正黑體"/>
-              </a:rPr>
-              <a:t/>
-            </a:r>
-          </a:p>
-          <a:p>
-            <a:pPr>
-              <a:spcAft>
-                <a:spcPts val="1000"/>
-              </a:spcAft>
-            </a:pPr>
             <a:r>
               <a:rPr sz="1600">
                 <a:solidFill>
@@ -5085,7 +5797,7 @@
                 </a:solidFill>
                 <a:latin typeface="微軟正黑體"/>
               </a:rPr>
-              <a:t>細節:725/報告_本週工作.md、725/操作文檔.md、實驗記錄_論文對齊.md</a:t>
+              <a:t>沒有任何一組同時達成「Acc 高於類別先驗 + 預測均衡」;同質性最高的半導體反而最差</a:t>
             </a:r>
           </a:p>
         </p:txBody>

--- a/725/進度報告.pptx
+++ b/725/進度報告.pptx
@@ -3247,40 +3247,6 @@
           </a:prstGeom>
         </p:spPr>
       </p:pic>
-      <p:sp>
-        <p:nvSpPr>
-          <p:cNvPr id="4" name="TextBox 3"/>
-          <p:cNvSpPr txBox="1"/>
-          <p:nvPr/>
-        </p:nvSpPr>
-        <p:spPr>
-          <a:xfrm>
-            <a:off x="731520" y="6263640"/>
-            <a:ext cx="10789920" cy="640080"/>
-          </a:xfrm>
-          <a:prstGeom prst="rect">
-            <a:avLst/>
-          </a:prstGeom>
-          <a:noFill/>
-        </p:spPr>
-        <p:txBody>
-          <a:bodyPr wrap="square">
-            <a:spAutoFit/>
-          </a:bodyPr>
-          <a:lstStyle/>
-          <a:p>
-            <a:r>
-              <a:rPr sz="1400">
-                <a:solidFill>
-                  <a:srgbClr val="52514E"/>
-                </a:solidFill>
-                <a:latin typeface="微軟正黑體"/>
-              </a:rPr>
-              <a:t>TW500 巢狀池(前 50 = 原 TW50);訓練樣本 9 萬 → 88.5 萬</a:t>
-            </a:r>
-          </a:p>
-        </p:txBody>
-      </p:sp>
     </p:spTree>
   </p:cSld>
   <p:clrMapOvr>
